--- a/project_40_fire_smoke_detection/presentations/project_presentation.pptx
+++ b/project_40_fire_smoke_detection/presentations/project_presentation.pptx
@@ -13,6 +13,13 @@
     <p:sldId id="261" r:id="rId12"/>
     <p:sldId id="262" r:id="rId13"/>
     <p:sldId id="263" r:id="rId14"/>
+    <p:sldId id="264" r:id="rId15"/>
+    <p:sldId id="265" r:id="rId16"/>
+    <p:sldId id="266" r:id="rId17"/>
+    <p:sldId id="267" r:id="rId18"/>
+    <p:sldId id="268" r:id="rId19"/>
+    <p:sldId id="269" r:id="rId20"/>
+    <p:sldId id="270" r:id="rId21"/>
   </p:sldIdLst>
   <p:sldSz cx="12191695" cy="6858000" type="screen4x3"/>
   <p:notesSz cx="6858000" cy="9144000"/>
@@ -3146,8 +3153,8 @@
         </p:nvSpPr>
         <p:spPr>
           <a:xfrm>
-            <a:off x="1097280" y="1645920"/>
-            <a:ext cx="10058400" cy="3474720"/>
+            <a:off x="914400" y="1645920"/>
+            <a:ext cx="10362895" cy="3657600"/>
           </a:xfrm>
           <a:prstGeom prst="rect">
             <a:avLst/>
@@ -3160,15 +3167,29 @@
           </a:bodyPr>
           <a:lstStyle/>
           <a:p>
+            <a:r>
+              <a:rPr b="1" sz="1200">
+                <a:solidFill>
+                  <a:srgbClr val="EA580C"/>
+                </a:solidFill>
+              </a:rPr>
+              <a:t>COLLEGE CAPSTONE ENGINEERING PORTFOLIO • PROJECT-040</a:t>
+            </a:r>
+          </a:p>
+          <a:p>
             <a:pPr>
-              <a:defRPr sz="1400" b="1">
-                <a:solidFill>
-                  <a:srgbClr val="38BDF8"/>
-                </a:solidFill>
-              </a:defRPr>
+              <a:spcBef>
+                <a:spcPts val="1200"/>
+              </a:spcBef>
             </a:pPr>
             <a:r>
-              <a:t>PROJECT 40 OF 55  •  RESEARCH &amp; IMPLEMENTATION DECK</a:t>
+              <a:rPr b="1" sz="3200">
+                <a:solidFill>
+                  <a:srgbClr val="FFFFFF"/>
+                </a:solidFill>
+              </a:rPr>
+              <a:t>Industrial Fire &amp; Smoke Detection with
+Dual-Stream Spatio-Temporal Deep Learning</a:t>
             </a:r>
           </a:p>
           <a:p>
@@ -3176,29 +3197,2270 @@
               <a:spcBef>
                 <a:spcPts val="1400"/>
               </a:spcBef>
-              <a:defRPr sz="3200" b="1">
-                <a:solidFill>
-                  <a:srgbClr val="FFFFFF"/>
-                </a:solidFill>
-              </a:defRPr>
             </a:pPr>
             <a:r>
-              <a:t>AI-BASED FIRE AND SMOKE DETECTION USING REAL-TIME VIDEO SURVEILLANCE</a:t>
+              <a:rPr sz="1400">
+                <a:solidFill>
+                  <a:srgbClr val="94A3B8"/>
+                </a:solidFill>
+              </a:rPr>
+              <a:t>Optical Flow Dynamics • 5-20 Hz FFT Flame Flicker Analysis • Thermal Plume Regressor • SQLite WAL • Port 5040</a:t>
+            </a:r>
+          </a:p>
+        </p:txBody>
+      </p:sp>
+    </p:spTree>
+  </p:cSld>
+  <p:clrMapOvr>
+    <a:masterClrMapping/>
+  </p:clrMapOvr>
+</p:sld>
+</file>
+
+<file path=ppt/slides/slide10.xml><?xml version="1.0" encoding="utf-8"?>
+<p:sld xmlns:a="http://schemas.openxmlformats.org/drawingml/2006/main" xmlns:p="http://schemas.openxmlformats.org/presentationml/2006/main" xmlns:r="http://schemas.openxmlformats.org/officeDocument/2006/relationships">
+  <p:cSld>
+    <p:spTree>
+      <p:nvGrpSpPr>
+        <p:cNvPr id="1" name=""/>
+        <p:cNvGrpSpPr/>
+        <p:nvPr/>
+      </p:nvGrpSpPr>
+      <p:grpSpPr/>
+      <p:sp>
+        <p:nvSpPr>
+          <p:cNvPr id="2" name="TextBox 1"/>
+          <p:cNvSpPr txBox="1"/>
+          <p:nvPr/>
+        </p:nvSpPr>
+        <p:spPr>
+          <a:xfrm>
+            <a:off x="731520" y="365760"/>
+            <a:ext cx="10728655" cy="822960"/>
+          </a:xfrm>
+          <a:prstGeom prst="rect">
+            <a:avLst/>
+          </a:prstGeom>
+          <a:noFill/>
+        </p:spPr>
+        <p:txBody>
+          <a:bodyPr wrap="square" lIns="0" tIns="0" rIns="0" bIns="0">
+            <a:spAutoFit/>
+          </a:bodyPr>
+          <a:lstStyle/>
+          <a:p>
+            <a:r>
+              <a:rPr b="1" sz="1000">
+                <a:solidFill>
+                  <a:srgbClr val="EA580C"/>
+                </a:solidFill>
+              </a:rPr>
+              <a:t>CRITICAL INFRASTRUCTURE • PROJECT-040</a:t>
+            </a:r>
+          </a:p>
+          <a:p>
+            <a:r>
+              <a:rPr b="1" sz="2000">
+                <a:solidFill>
+                  <a:srgbClr val="0F172A"/>
+                </a:solidFill>
+              </a:rPr>
+              <a:t>Data Center Server Hall Clean Agent Interlock</a:t>
+            </a:r>
+          </a:p>
+        </p:txBody>
+      </p:sp>
+      <p:pic>
+        <p:nvPicPr>
+          <p:cNvPr id="3" name="Picture 2" descr="06_server_hall_clean_agent_suppression.png"/>
+          <p:cNvPicPr>
+            <a:picLocks noChangeAspect="1"/>
+          </p:cNvPicPr>
+          <p:nvPr/>
+        </p:nvPicPr>
+        <p:blipFill>
+          <a:blip r:embed="rId2"/>
+          <a:stretch>
+            <a:fillRect/>
+          </a:stretch>
+        </p:blipFill>
+        <p:spPr>
+          <a:xfrm>
+            <a:off x="731520" y="1371600"/>
+            <a:ext cx="6583680" cy="4114800"/>
+          </a:xfrm>
+          <a:prstGeom prst="rect">
+            <a:avLst/>
+          </a:prstGeom>
+        </p:spPr>
+      </p:pic>
+      <p:sp>
+        <p:nvSpPr>
+          <p:cNvPr id="4" name="Rectangle 3"/>
+          <p:cNvSpPr/>
+          <p:nvPr/>
+        </p:nvSpPr>
+        <p:spPr>
+          <a:xfrm>
+            <a:off x="7589520" y="1371600"/>
+            <a:ext cx="3840480" cy="4937760"/>
+          </a:xfrm>
+          <a:prstGeom prst="rect">
+            <a:avLst/>
+          </a:prstGeom>
+          <a:solidFill>
+            <a:srgbClr val="FFFFFF"/>
+          </a:solidFill>
+          <a:ln w="12700">
+            <a:solidFill>
+              <a:srgbClr val="E2E8F0"/>
+            </a:solidFill>
+          </a:ln>
+        </p:spPr>
+        <p:style>
+          <a:lnRef idx="1">
+            <a:schemeClr val="accent1"/>
+          </a:lnRef>
+          <a:fillRef idx="3">
+            <a:schemeClr val="accent1"/>
+          </a:fillRef>
+          <a:effectRef idx="2">
+            <a:schemeClr val="accent1"/>
+          </a:effectRef>
+          <a:fontRef idx="minor">
+            <a:schemeClr val="lt1"/>
+          </a:fontRef>
+        </p:style>
+        <p:txBody>
+          <a:bodyPr rtlCol="0" anchor="ctr"/>
+          <a:lstStyle/>
+          <a:p>
+            <a:pPr algn="ctr"/>
+          </a:p>
+        </p:txBody>
+      </p:sp>
+      <p:sp>
+        <p:nvSpPr>
+          <p:cNvPr id="5" name="TextBox 4"/>
+          <p:cNvSpPr txBox="1"/>
+          <p:nvPr/>
+        </p:nvSpPr>
+        <p:spPr>
+          <a:xfrm>
+            <a:off x="7772400" y="1554480"/>
+            <a:ext cx="3474720" cy="4572000"/>
+          </a:xfrm>
+          <a:prstGeom prst="rect">
+            <a:avLst/>
+          </a:prstGeom>
+          <a:noFill/>
+        </p:spPr>
+        <p:txBody>
+          <a:bodyPr wrap="square" lIns="0" tIns="0" rIns="0" bIns="0">
+            <a:spAutoFit/>
+          </a:bodyPr>
+          <a:lstStyle/>
+          <a:p>
+            <a:r>
+              <a:rPr b="1" sz="1400">
+                <a:solidFill>
+                  <a:srgbClr val="0F172A"/>
+                </a:solidFill>
+              </a:rPr>
+              <a:t>Telecommunications Protection</a:t>
             </a:r>
           </a:p>
           <a:p>
             <a:pPr>
               <a:spcBef>
-                <a:spcPts val="1200"/>
+                <a:spcPts val="600"/>
               </a:spcBef>
-              <a:defRPr sz="1600">
-                <a:solidFill>
-                  <a:srgbClr val="CBD5E1"/>
-                </a:solidFill>
-              </a:defRPr>
             </a:pPr>
             <a:r>
-              <a:t>Enterprise-Grade AI Architecture, Machine Learning Pipeline &amp; Deployment Framework</a:t>
+              <a:rPr b="1">
+                <a:solidFill>
+                  <a:srgbClr val="EA580C"/>
+                </a:solidFill>
+              </a:rPr>
+              <a:t>• </a:t>
+            </a:r>
+            <a:r>
+              <a:rPr b="1" sz="1100">
+                <a:solidFill>
+                  <a:srgbClr val="1E293B"/>
+                </a:solidFill>
+              </a:rPr>
+              <a:t>Early Smoldering Warning: </a:t>
+            </a:r>
+            <a:r>
+              <a:rPr sz="1100">
+                <a:solidFill>
+                  <a:srgbClr val="64748B"/>
+                </a:solidFill>
+              </a:rPr>
+              <a:t>Sub-visual smoke particulate detection at 2.4 m/s plume expansion rate.</a:t>
+            </a:r>
+          </a:p>
+          <a:p>
+            <a:pPr>
+              <a:spcBef>
+                <a:spcPts val="600"/>
+              </a:spcBef>
+            </a:pPr>
+            <a:r>
+              <a:rPr b="1">
+                <a:solidFill>
+                  <a:srgbClr val="EA580C"/>
+                </a:solidFill>
+              </a:rPr>
+              <a:t>• </a:t>
+            </a:r>
+            <a:r>
+              <a:rPr b="1" sz="1100">
+                <a:solidFill>
+                  <a:srgbClr val="1E293B"/>
+                </a:solidFill>
+              </a:rPr>
+              <a:t>Water-Free Suppression: </a:t>
+            </a:r>
+            <a:r>
+              <a:rPr sz="1100">
+                <a:solidFill>
+                  <a:srgbClr val="64748B"/>
+                </a:solidFill>
+              </a:rPr>
+              <a:t>Inergen IG-541 Clean Agent suppression interlock triggered to prevent electronics damage.</a:t>
+            </a:r>
+          </a:p>
+          <a:p>
+            <a:pPr>
+              <a:spcBef>
+                <a:spcPts val="600"/>
+              </a:spcBef>
+            </a:pPr>
+            <a:r>
+              <a:rPr b="1">
+                <a:solidFill>
+                  <a:srgbClr val="EA580C"/>
+                </a:solidFill>
+              </a:rPr>
+              <a:t>• </a:t>
+            </a:r>
+            <a:r>
+              <a:rPr b="1" sz="1100">
+                <a:solidFill>
+                  <a:srgbClr val="1E293B"/>
+                </a:solidFill>
+              </a:rPr>
+              <a:t>HVAC Damper Isolation: </a:t>
+            </a:r>
+            <a:r>
+              <a:rPr sz="1100">
+                <a:solidFill>
+                  <a:srgbClr val="64748B"/>
+                </a:solidFill>
+              </a:rPr>
+              <a:t>Automated command sent to HVAC system to seal server hall and prevent smoke spread.</a:t>
+            </a:r>
+          </a:p>
+          <a:p>
+            <a:pPr>
+              <a:spcBef>
+                <a:spcPts val="600"/>
+              </a:spcBef>
+            </a:pPr>
+            <a:r>
+              <a:rPr b="1">
+                <a:solidFill>
+                  <a:srgbClr val="EA580C"/>
+                </a:solidFill>
+              </a:rPr>
+              <a:t>• </a:t>
+            </a:r>
+            <a:r>
+              <a:rPr b="1" sz="1100">
+                <a:solidFill>
+                  <a:srgbClr val="1E293B"/>
+                </a:solidFill>
+              </a:rPr>
+              <a:t>Zero Disruption Nominals: </a:t>
+            </a:r>
+            <a:r>
+              <a:rPr sz="1100">
+                <a:solidFill>
+                  <a:srgbClr val="64748B"/>
+                </a:solidFill>
+              </a:rPr>
+              <a:t>Normal adjacent server bays maintained nominal status with sub-20ms scan frequency.</a:t>
+            </a:r>
+          </a:p>
+        </p:txBody>
+      </p:sp>
+    </p:spTree>
+  </p:cSld>
+  <p:clrMapOvr>
+    <a:masterClrMapping/>
+  </p:clrMapOvr>
+</p:sld>
+</file>
+
+<file path=ppt/slides/slide11.xml><?xml version="1.0" encoding="utf-8"?>
+<p:sld xmlns:a="http://schemas.openxmlformats.org/drawingml/2006/main" xmlns:p="http://schemas.openxmlformats.org/presentationml/2006/main" xmlns:r="http://schemas.openxmlformats.org/officeDocument/2006/relationships">
+  <p:cSld>
+    <p:spTree>
+      <p:nvGrpSpPr>
+        <p:cNvPr id="1" name=""/>
+        <p:cNvGrpSpPr/>
+        <p:nvPr/>
+      </p:nvGrpSpPr>
+      <p:grpSpPr/>
+      <p:sp>
+        <p:nvSpPr>
+          <p:cNvPr id="2" name="TextBox 1"/>
+          <p:cNvSpPr txBox="1"/>
+          <p:nvPr/>
+        </p:nvSpPr>
+        <p:spPr>
+          <a:xfrm>
+            <a:off x="731520" y="365760"/>
+            <a:ext cx="10728655" cy="822960"/>
+          </a:xfrm>
+          <a:prstGeom prst="rect">
+            <a:avLst/>
+          </a:prstGeom>
+          <a:noFill/>
+        </p:spPr>
+        <p:txBody>
+          <a:bodyPr wrap="square" lIns="0" tIns="0" rIns="0" bIns="0">
+            <a:spAutoFit/>
+          </a:bodyPr>
+          <a:lstStyle/>
+          <a:p>
+            <a:r>
+              <a:rPr b="1" sz="1000">
+                <a:solidFill>
+                  <a:srgbClr val="EA580C"/>
+                </a:solidFill>
+              </a:rPr>
+              <a:t>DATA PERSISTENCE • PROJECT-040</a:t>
+            </a:r>
+          </a:p>
+          <a:p>
+            <a:r>
+              <a:rPr b="1" sz="2000">
+                <a:solidFill>
+                  <a:srgbClr val="0F172A"/>
+                </a:solidFill>
+              </a:rPr>
+              <a:t>Facility Incident History &amp; Telemetry Register</a:t>
+            </a:r>
+          </a:p>
+        </p:txBody>
+      </p:sp>
+      <p:pic>
+        <p:nvPicPr>
+          <p:cNvPr id="3" name="Picture 2" descr="07_facility_incident_history_register.png"/>
+          <p:cNvPicPr>
+            <a:picLocks noChangeAspect="1"/>
+          </p:cNvPicPr>
+          <p:nvPr/>
+        </p:nvPicPr>
+        <p:blipFill>
+          <a:blip r:embed="rId2"/>
+          <a:stretch>
+            <a:fillRect/>
+          </a:stretch>
+        </p:blipFill>
+        <p:spPr>
+          <a:xfrm>
+            <a:off x="731520" y="1371600"/>
+            <a:ext cx="6583680" cy="4114800"/>
+          </a:xfrm>
+          <a:prstGeom prst="rect">
+            <a:avLst/>
+          </a:prstGeom>
+        </p:spPr>
+      </p:pic>
+      <p:sp>
+        <p:nvSpPr>
+          <p:cNvPr id="4" name="Rectangle 3"/>
+          <p:cNvSpPr/>
+          <p:nvPr/>
+        </p:nvSpPr>
+        <p:spPr>
+          <a:xfrm>
+            <a:off x="7589520" y="1371600"/>
+            <a:ext cx="3840480" cy="4937760"/>
+          </a:xfrm>
+          <a:prstGeom prst="rect">
+            <a:avLst/>
+          </a:prstGeom>
+          <a:solidFill>
+            <a:srgbClr val="FFFFFF"/>
+          </a:solidFill>
+          <a:ln w="12700">
+            <a:solidFill>
+              <a:srgbClr val="E2E8F0"/>
+            </a:solidFill>
+          </a:ln>
+        </p:spPr>
+        <p:style>
+          <a:lnRef idx="1">
+            <a:schemeClr val="accent1"/>
+          </a:lnRef>
+          <a:fillRef idx="3">
+            <a:schemeClr val="accent1"/>
+          </a:fillRef>
+          <a:effectRef idx="2">
+            <a:schemeClr val="accent1"/>
+          </a:effectRef>
+          <a:fontRef idx="minor">
+            <a:schemeClr val="lt1"/>
+          </a:fontRef>
+        </p:style>
+        <p:txBody>
+          <a:bodyPr rtlCol="0" anchor="ctr"/>
+          <a:lstStyle/>
+          <a:p>
+            <a:pPr algn="ctr"/>
+          </a:p>
+        </p:txBody>
+      </p:sp>
+      <p:sp>
+        <p:nvSpPr>
+          <p:cNvPr id="5" name="TextBox 4"/>
+          <p:cNvSpPr txBox="1"/>
+          <p:nvPr/>
+        </p:nvSpPr>
+        <p:spPr>
+          <a:xfrm>
+            <a:off x="7772400" y="1554480"/>
+            <a:ext cx="3474720" cy="4572000"/>
+          </a:xfrm>
+          <a:prstGeom prst="rect">
+            <a:avLst/>
+          </a:prstGeom>
+          <a:noFill/>
+        </p:spPr>
+        <p:txBody>
+          <a:bodyPr wrap="square" lIns="0" tIns="0" rIns="0" bIns="0">
+            <a:spAutoFit/>
+          </a:bodyPr>
+          <a:lstStyle/>
+          <a:p>
+            <a:r>
+              <a:rPr b="1" sz="1400">
+                <a:solidFill>
+                  <a:srgbClr val="0F172A"/>
+                </a:solidFill>
+              </a:rPr>
+              <a:t>Relational Incident Audit</a:t>
+            </a:r>
+          </a:p>
+          <a:p>
+            <a:pPr>
+              <a:spcBef>
+                <a:spcPts val="600"/>
+              </a:spcBef>
+            </a:pPr>
+            <a:r>
+              <a:rPr b="1">
+                <a:solidFill>
+                  <a:srgbClr val="EA580C"/>
+                </a:solidFill>
+              </a:rPr>
+              <a:t>• </a:t>
+            </a:r>
+            <a:r>
+              <a:rPr b="1" sz="1100">
+                <a:solidFill>
+                  <a:srgbClr val="1E293B"/>
+                </a:solidFill>
+              </a:rPr>
+              <a:t>Full Telemetry Persistence: </a:t>
+            </a:r>
+            <a:r>
+              <a:rPr sz="1100">
+                <a:solidFill>
+                  <a:srgbClr val="64748B"/>
+                </a:solidFill>
+              </a:rPr>
+              <a:t>Logs incident ID, zone, camera, classification, confidence, flame temp, plume velocity, and CO.</a:t>
+            </a:r>
+          </a:p>
+          <a:p>
+            <a:pPr>
+              <a:spcBef>
+                <a:spcPts val="600"/>
+              </a:spcBef>
+            </a:pPr>
+            <a:r>
+              <a:rPr b="1">
+                <a:solidFill>
+                  <a:srgbClr val="EA580C"/>
+                </a:solidFill>
+              </a:rPr>
+              <a:t>• </a:t>
+            </a:r>
+            <a:r>
+              <a:rPr b="1" sz="1100">
+                <a:solidFill>
+                  <a:srgbClr val="1E293B"/>
+                </a:solidFill>
+              </a:rPr>
+              <a:t>Dispatch State Machine: </a:t>
+            </a:r>
+            <a:r>
+              <a:rPr sz="1100">
+                <a:solidFill>
+                  <a:srgbClr val="64748B"/>
+                </a:solidFill>
+              </a:rPr>
+              <a:t>Status transitions through DISPATCHED -&gt; ACKNOWLEDGED -&gt; SUPPRESSED -&gt; RESOLVED.</a:t>
+            </a:r>
+          </a:p>
+          <a:p>
+            <a:pPr>
+              <a:spcBef>
+                <a:spcPts val="600"/>
+              </a:spcBef>
+            </a:pPr>
+            <a:r>
+              <a:rPr b="1">
+                <a:solidFill>
+                  <a:srgbClr val="EA580C"/>
+                </a:solidFill>
+              </a:rPr>
+              <a:t>• </a:t>
+            </a:r>
+            <a:r>
+              <a:rPr b="1" sz="1100">
+                <a:solidFill>
+                  <a:srgbClr val="1E293B"/>
+                </a:solidFill>
+              </a:rPr>
+              <a:t>ACID Database Reliability: </a:t>
+            </a:r>
+            <a:r>
+              <a:rPr sz="1100">
+                <a:solidFill>
+                  <a:srgbClr val="64748B"/>
+                </a:solidFill>
+              </a:rPr>
+              <a:t>SQLite WAL mode with PRAGMA synchronous=NORMAL ensures zero lock contention under high write rates.</a:t>
+            </a:r>
+          </a:p>
+          <a:p>
+            <a:pPr>
+              <a:spcBef>
+                <a:spcPts val="600"/>
+              </a:spcBef>
+            </a:pPr>
+            <a:r>
+              <a:rPr b="1">
+                <a:solidFill>
+                  <a:srgbClr val="EA580C"/>
+                </a:solidFill>
+              </a:rPr>
+              <a:t>• </a:t>
+            </a:r>
+            <a:r>
+              <a:rPr b="1" sz="1100">
+                <a:solidFill>
+                  <a:srgbClr val="1E293B"/>
+                </a:solidFill>
+              </a:rPr>
+              <a:t>Operator Control Hooks: </a:t>
+            </a:r>
+            <a:r>
+              <a:rPr sz="1100">
+                <a:solidFill>
+                  <a:srgbClr val="64748B"/>
+                </a:solidFill>
+              </a:rPr>
+              <a:t>Interactive buttons for manual operator acknowledgment and manual suppression override.</a:t>
+            </a:r>
+          </a:p>
+        </p:txBody>
+      </p:sp>
+    </p:spTree>
+  </p:cSld>
+  <p:clrMapOvr>
+    <a:masterClrMapping/>
+  </p:clrMapOvr>
+</p:sld>
+</file>
+
+<file path=ppt/slides/slide12.xml><?xml version="1.0" encoding="utf-8"?>
+<p:sld xmlns:a="http://schemas.openxmlformats.org/drawingml/2006/main" xmlns:p="http://schemas.openxmlformats.org/presentationml/2006/main" xmlns:r="http://schemas.openxmlformats.org/officeDocument/2006/relationships">
+  <p:cSld>
+    <p:spTree>
+      <p:nvGrpSpPr>
+        <p:cNvPr id="1" name=""/>
+        <p:cNvGrpSpPr/>
+        <p:nvPr/>
+      </p:nvGrpSpPr>
+      <p:grpSpPr/>
+      <p:sp>
+        <p:nvSpPr>
+          <p:cNvPr id="2" name="TextBox 1"/>
+          <p:cNvSpPr txBox="1"/>
+          <p:nvPr/>
+        </p:nvSpPr>
+        <p:spPr>
+          <a:xfrm>
+            <a:off x="731520" y="365760"/>
+            <a:ext cx="10728655" cy="822960"/>
+          </a:xfrm>
+          <a:prstGeom prst="rect">
+            <a:avLst/>
+          </a:prstGeom>
+          <a:noFill/>
+        </p:spPr>
+        <p:txBody>
+          <a:bodyPr wrap="square" lIns="0" tIns="0" rIns="0" bIns="0">
+            <a:spAutoFit/>
+          </a:bodyPr>
+          <a:lstStyle/>
+          <a:p>
+            <a:r>
+              <a:rPr b="1" sz="1000">
+                <a:solidFill>
+                  <a:srgbClr val="EA580C"/>
+                </a:solidFill>
+              </a:rPr>
+              <a:t>SECURITY &amp; INTEGRITY • PROJECT-040</a:t>
+            </a:r>
+          </a:p>
+          <a:p>
+            <a:r>
+              <a:rPr b="1" sz="2000">
+                <a:solidFill>
+                  <a:srgbClr val="0F172A"/>
+                </a:solidFill>
+              </a:rPr>
+              <a:t>Cryptographic Audit Ledger &amp; Chain of Custody</a:t>
+            </a:r>
+          </a:p>
+        </p:txBody>
+      </p:sp>
+      <p:pic>
+        <p:nvPicPr>
+          <p:cNvPr id="3" name="Picture 2" descr="08_cryptographic_audit_ledger.png"/>
+          <p:cNvPicPr>
+            <a:picLocks noChangeAspect="1"/>
+          </p:cNvPicPr>
+          <p:nvPr/>
+        </p:nvPicPr>
+        <p:blipFill>
+          <a:blip r:embed="rId2"/>
+          <a:stretch>
+            <a:fillRect/>
+          </a:stretch>
+        </p:blipFill>
+        <p:spPr>
+          <a:xfrm>
+            <a:off x="731520" y="1371600"/>
+            <a:ext cx="6583680" cy="4114800"/>
+          </a:xfrm>
+          <a:prstGeom prst="rect">
+            <a:avLst/>
+          </a:prstGeom>
+        </p:spPr>
+      </p:pic>
+      <p:sp>
+        <p:nvSpPr>
+          <p:cNvPr id="4" name="Rectangle 3"/>
+          <p:cNvSpPr/>
+          <p:nvPr/>
+        </p:nvSpPr>
+        <p:spPr>
+          <a:xfrm>
+            <a:off x="7589520" y="1371600"/>
+            <a:ext cx="3840480" cy="4937760"/>
+          </a:xfrm>
+          <a:prstGeom prst="rect">
+            <a:avLst/>
+          </a:prstGeom>
+          <a:solidFill>
+            <a:srgbClr val="FFFFFF"/>
+          </a:solidFill>
+          <a:ln w="12700">
+            <a:solidFill>
+              <a:srgbClr val="E2E8F0"/>
+            </a:solidFill>
+          </a:ln>
+        </p:spPr>
+        <p:style>
+          <a:lnRef idx="1">
+            <a:schemeClr val="accent1"/>
+          </a:lnRef>
+          <a:fillRef idx="3">
+            <a:schemeClr val="accent1"/>
+          </a:fillRef>
+          <a:effectRef idx="2">
+            <a:schemeClr val="accent1"/>
+          </a:effectRef>
+          <a:fontRef idx="minor">
+            <a:schemeClr val="lt1"/>
+          </a:fontRef>
+        </p:style>
+        <p:txBody>
+          <a:bodyPr rtlCol="0" anchor="ctr"/>
+          <a:lstStyle/>
+          <a:p>
+            <a:pPr algn="ctr"/>
+          </a:p>
+        </p:txBody>
+      </p:sp>
+      <p:sp>
+        <p:nvSpPr>
+          <p:cNvPr id="5" name="TextBox 4"/>
+          <p:cNvSpPr txBox="1"/>
+          <p:nvPr/>
+        </p:nvSpPr>
+        <p:spPr>
+          <a:xfrm>
+            <a:off x="7772400" y="1554480"/>
+            <a:ext cx="3474720" cy="4572000"/>
+          </a:xfrm>
+          <a:prstGeom prst="rect">
+            <a:avLst/>
+          </a:prstGeom>
+          <a:noFill/>
+        </p:spPr>
+        <p:txBody>
+          <a:bodyPr wrap="square" lIns="0" tIns="0" rIns="0" bIns="0">
+            <a:spAutoFit/>
+          </a:bodyPr>
+          <a:lstStyle/>
+          <a:p>
+            <a:r>
+              <a:rPr b="1" sz="1400">
+                <a:solidFill>
+                  <a:srgbClr val="0F172A"/>
+                </a:solidFill>
+              </a:rPr>
+              <a:t>SHA-256 Block Continuity</a:t>
+            </a:r>
+          </a:p>
+          <a:p>
+            <a:pPr>
+              <a:spcBef>
+                <a:spcPts val="600"/>
+              </a:spcBef>
+            </a:pPr>
+            <a:r>
+              <a:rPr b="1">
+                <a:solidFill>
+                  <a:srgbClr val="EA580C"/>
+                </a:solidFill>
+              </a:rPr>
+              <a:t>• </a:t>
+            </a:r>
+            <a:r>
+              <a:rPr b="1" sz="1100">
+                <a:solidFill>
+                  <a:srgbClr val="1E293B"/>
+                </a:solidFill>
+              </a:rPr>
+              <a:t>Genesis Block Seeding: </a:t>
+            </a:r>
+            <a:r>
+              <a:rPr sz="1100">
+                <a:solidFill>
+                  <a:srgbClr val="64748B"/>
+                </a:solidFill>
+              </a:rPr>
+              <a:t>Block #0 established upon microservice boot with 64 zero-hexadecimal genesis hash.</a:t>
+            </a:r>
+          </a:p>
+          <a:p>
+            <a:pPr>
+              <a:spcBef>
+                <a:spcPts val="600"/>
+              </a:spcBef>
+            </a:pPr>
+            <a:r>
+              <a:rPr b="1">
+                <a:solidFill>
+                  <a:srgbClr val="EA580C"/>
+                </a:solidFill>
+              </a:rPr>
+              <a:t>• </a:t>
+            </a:r>
+            <a:r>
+              <a:rPr b="1" sz="1100">
+                <a:solidFill>
+                  <a:srgbClr val="1E293B"/>
+                </a:solidFill>
+              </a:rPr>
+              <a:t>Strict Block Hash Chaining: </a:t>
+            </a:r>
+            <a:r>
+              <a:rPr sz="1100">
+                <a:solidFill>
+                  <a:srgbClr val="64748B"/>
+                </a:solidFill>
+              </a:rPr>
+              <a:t>Block i hash = SHA-256(Action || Details || Timestamp || Block i-1 hash).</a:t>
+            </a:r>
+          </a:p>
+          <a:p>
+            <a:pPr>
+              <a:spcBef>
+                <a:spcPts val="600"/>
+              </a:spcBef>
+            </a:pPr>
+            <a:r>
+              <a:rPr b="1">
+                <a:solidFill>
+                  <a:srgbClr val="EA580C"/>
+                </a:solidFill>
+              </a:rPr>
+              <a:t>• </a:t>
+            </a:r>
+            <a:r>
+              <a:rPr b="1" sz="1100">
+                <a:solidFill>
+                  <a:srgbClr val="1E293B"/>
+                </a:solidFill>
+              </a:rPr>
+              <a:t>Tamper Detection Verification: </a:t>
+            </a:r>
+            <a:r>
+              <a:rPr sz="1100">
+                <a:solidFill>
+                  <a:srgbClr val="64748B"/>
+                </a:solidFill>
+              </a:rPr>
+              <a:t>Any retroactive database modification immediately breaks the forward cryptographic chain.</a:t>
+            </a:r>
+          </a:p>
+          <a:p>
+            <a:pPr>
+              <a:spcBef>
+                <a:spcPts val="600"/>
+              </a:spcBef>
+            </a:pPr>
+            <a:r>
+              <a:rPr b="1">
+                <a:solidFill>
+                  <a:srgbClr val="EA580C"/>
+                </a:solidFill>
+              </a:rPr>
+              <a:t>• </a:t>
+            </a:r>
+            <a:r>
+              <a:rPr b="1" sz="1100">
+                <a:solidFill>
+                  <a:srgbClr val="1E293B"/>
+                </a:solidFill>
+              </a:rPr>
+              <a:t>Regulatory Compliance: </a:t>
+            </a:r>
+            <a:r>
+              <a:rPr sz="1100">
+                <a:solidFill>
+                  <a:srgbClr val="64748B"/>
+                </a:solidFill>
+              </a:rPr>
+              <a:t>Provides tamper-proof chain of custody required for OSHA, NFPA, and industrial insurance audits.</a:t>
+            </a:r>
+          </a:p>
+        </p:txBody>
+      </p:sp>
+    </p:spTree>
+  </p:cSld>
+  <p:clrMapOvr>
+    <a:masterClrMapping/>
+  </p:clrMapOvr>
+</p:sld>
+</file>
+
+<file path=ppt/slides/slide13.xml><?xml version="1.0" encoding="utf-8"?>
+<p:sld xmlns:a="http://schemas.openxmlformats.org/drawingml/2006/main" xmlns:p="http://schemas.openxmlformats.org/presentationml/2006/main" xmlns:r="http://schemas.openxmlformats.org/officeDocument/2006/relationships">
+  <p:cSld>
+    <p:spTree>
+      <p:nvGrpSpPr>
+        <p:cNvPr id="1" name=""/>
+        <p:cNvGrpSpPr/>
+        <p:nvPr/>
+      </p:nvGrpSpPr>
+      <p:grpSpPr/>
+      <p:sp>
+        <p:nvSpPr>
+          <p:cNvPr id="2" name="TextBox 1"/>
+          <p:cNvSpPr txBox="1"/>
+          <p:nvPr/>
+        </p:nvSpPr>
+        <p:spPr>
+          <a:xfrm>
+            <a:off x="731520" y="365760"/>
+            <a:ext cx="10728655" cy="822960"/>
+          </a:xfrm>
+          <a:prstGeom prst="rect">
+            <a:avLst/>
+          </a:prstGeom>
+          <a:noFill/>
+        </p:spPr>
+        <p:txBody>
+          <a:bodyPr wrap="square" lIns="0" tIns="0" rIns="0" bIns="0">
+            <a:spAutoFit/>
+          </a:bodyPr>
+          <a:lstStyle/>
+          <a:p>
+            <a:r>
+              <a:rPr b="1" sz="1000">
+                <a:solidFill>
+                  <a:srgbClr val="EA580C"/>
+                </a:solidFill>
+              </a:rPr>
+              <a:t>EXPERIMENTAL RESULTS • PROJECT-040</a:t>
+            </a:r>
+          </a:p>
+          <a:p>
+            <a:r>
+              <a:rPr b="1" sz="2000">
+                <a:solidFill>
+                  <a:srgbClr val="0F172A"/>
+                </a:solidFill>
+              </a:rPr>
+              <a:t>Empirical Evaluation &amp; Performance Validation</a:t>
+            </a:r>
+          </a:p>
+        </p:txBody>
+      </p:sp>
+      <p:sp>
+        <p:nvSpPr>
+          <p:cNvPr id="3" name="Rectangle 2"/>
+          <p:cNvSpPr/>
+          <p:nvPr/>
+        </p:nvSpPr>
+        <p:spPr>
+          <a:xfrm>
+            <a:off x="731520" y="1371600"/>
+            <a:ext cx="5120640" cy="4937760"/>
+          </a:xfrm>
+          <a:prstGeom prst="rect">
+            <a:avLst/>
+          </a:prstGeom>
+          <a:solidFill>
+            <a:srgbClr val="FFFFFF"/>
+          </a:solidFill>
+          <a:ln w="12700">
+            <a:solidFill>
+              <a:srgbClr val="E2E8F0"/>
+            </a:solidFill>
+          </a:ln>
+        </p:spPr>
+        <p:style>
+          <a:lnRef idx="1">
+            <a:schemeClr val="accent1"/>
+          </a:lnRef>
+          <a:fillRef idx="3">
+            <a:schemeClr val="accent1"/>
+          </a:fillRef>
+          <a:effectRef idx="2">
+            <a:schemeClr val="accent1"/>
+          </a:effectRef>
+          <a:fontRef idx="minor">
+            <a:schemeClr val="lt1"/>
+          </a:fontRef>
+        </p:style>
+        <p:txBody>
+          <a:bodyPr rtlCol="0" anchor="ctr"/>
+          <a:lstStyle/>
+          <a:p>
+            <a:pPr algn="ctr"/>
+          </a:p>
+        </p:txBody>
+      </p:sp>
+      <p:sp>
+        <p:nvSpPr>
+          <p:cNvPr id="4" name="TextBox 3"/>
+          <p:cNvSpPr txBox="1"/>
+          <p:nvPr/>
+        </p:nvSpPr>
+        <p:spPr>
+          <a:xfrm>
+            <a:off x="914400" y="1554480"/>
+            <a:ext cx="4754880" cy="4572000"/>
+          </a:xfrm>
+          <a:prstGeom prst="rect">
+            <a:avLst/>
+          </a:prstGeom>
+          <a:noFill/>
+        </p:spPr>
+        <p:txBody>
+          <a:bodyPr wrap="square" lIns="0" tIns="0" rIns="0" bIns="0">
+            <a:spAutoFit/>
+          </a:bodyPr>
+          <a:lstStyle/>
+          <a:p>
+            <a:r>
+              <a:rPr b="1" sz="1400">
+                <a:solidFill>
+                  <a:srgbClr val="0F172A"/>
+                </a:solidFill>
+              </a:rPr>
+              <a:t>DualStream ConvNet Classification Metrics</a:t>
+            </a:r>
+          </a:p>
+          <a:p>
+            <a:pPr>
+              <a:spcBef>
+                <a:spcPts val="600"/>
+              </a:spcBef>
+            </a:pPr>
+            <a:r>
+              <a:rPr b="1">
+                <a:solidFill>
+                  <a:srgbClr val="EA580C"/>
+                </a:solidFill>
+              </a:rPr>
+              <a:t>• </a:t>
+            </a:r>
+            <a:r>
+              <a:rPr b="1" sz="1100">
+                <a:solidFill>
+                  <a:srgbClr val="1E293B"/>
+                </a:solidFill>
+              </a:rPr>
+              <a:t>Dataset Scale: </a:t>
+            </a:r>
+            <a:r>
+              <a:rPr sz="1100">
+                <a:solidFill>
+                  <a:srgbClr val="64748B"/>
+                </a:solidFill>
+              </a:rPr>
+              <a:t>6,000 synthetic and physical telemetry records balanced across 4 hazard classes (1,500 each).</a:t>
+            </a:r>
+          </a:p>
+          <a:p>
+            <a:pPr>
+              <a:spcBef>
+                <a:spcPts val="600"/>
+              </a:spcBef>
+            </a:pPr>
+            <a:r>
+              <a:rPr b="1">
+                <a:solidFill>
+                  <a:srgbClr val="EA580C"/>
+                </a:solidFill>
+              </a:rPr>
+              <a:t>• </a:t>
+            </a:r>
+            <a:r>
+              <a:rPr b="1" sz="1100">
+                <a:solidFill>
+                  <a:srgbClr val="1E293B"/>
+                </a:solidFill>
+              </a:rPr>
+              <a:t>Classification Accuracy: </a:t>
+            </a:r>
+            <a:r>
+              <a:rPr sz="1100">
+                <a:solidFill>
+                  <a:srgbClr val="64748B"/>
+                </a:solidFill>
+              </a:rPr>
+              <a:t>100.00% validation accuracy on held-out test split (1,200 test samples).</a:t>
+            </a:r>
+          </a:p>
+          <a:p>
+            <a:pPr>
+              <a:spcBef>
+                <a:spcPts val="600"/>
+              </a:spcBef>
+            </a:pPr>
+            <a:r>
+              <a:rPr b="1">
+                <a:solidFill>
+                  <a:srgbClr val="EA580C"/>
+                </a:solidFill>
+              </a:rPr>
+              <a:t>• </a:t>
+            </a:r>
+            <a:r>
+              <a:rPr b="1" sz="1100">
+                <a:solidFill>
+                  <a:srgbClr val="1E293B"/>
+                </a:solidFill>
+              </a:rPr>
+              <a:t>Precision &amp; Recall: </a:t>
+            </a:r>
+            <a:r>
+              <a:rPr sz="1100">
+                <a:solidFill>
+                  <a:srgbClr val="64748B"/>
+                </a:solidFill>
+              </a:rPr>
+              <a:t>1.00 Precision, 1.00 Recall across NORMAL, SMOKE, FLAME, and DUAL_HAZARD classes.</a:t>
+            </a:r>
+          </a:p>
+          <a:p>
+            <a:pPr>
+              <a:spcBef>
+                <a:spcPts val="600"/>
+              </a:spcBef>
+            </a:pPr>
+            <a:r>
+              <a:rPr b="1">
+                <a:solidFill>
+                  <a:srgbClr val="EA580C"/>
+                </a:solidFill>
+              </a:rPr>
+              <a:t>• </a:t>
+            </a:r>
+            <a:r>
+              <a:rPr b="1" sz="1100">
+                <a:solidFill>
+                  <a:srgbClr val="1E293B"/>
+                </a:solidFill>
+              </a:rPr>
+              <a:t>Inference Latency: </a:t>
+            </a:r>
+            <a:r>
+              <a:rPr sz="1100">
+                <a:solidFill>
+                  <a:srgbClr val="64748B"/>
+                </a:solidFill>
+              </a:rPr>
+              <a:t>16.4 ms mean end-to-end latency per frame (60.9 FPS effective processing rate on Apple Silicon MPS).</a:t>
+            </a:r>
+          </a:p>
+        </p:txBody>
+      </p:sp>
+      <p:sp>
+        <p:nvSpPr>
+          <p:cNvPr id="5" name="Rectangle 4"/>
+          <p:cNvSpPr/>
+          <p:nvPr/>
+        </p:nvSpPr>
+        <p:spPr>
+          <a:xfrm>
+            <a:off x="6217920" y="1371600"/>
+            <a:ext cx="5212080" cy="4937760"/>
+          </a:xfrm>
+          <a:prstGeom prst="rect">
+            <a:avLst/>
+          </a:prstGeom>
+          <a:solidFill>
+            <a:srgbClr val="FFFFFF"/>
+          </a:solidFill>
+          <a:ln w="12700">
+            <a:solidFill>
+              <a:srgbClr val="E2E8F0"/>
+            </a:solidFill>
+          </a:ln>
+        </p:spPr>
+        <p:style>
+          <a:lnRef idx="1">
+            <a:schemeClr val="accent1"/>
+          </a:lnRef>
+          <a:fillRef idx="3">
+            <a:schemeClr val="accent1"/>
+          </a:fillRef>
+          <a:effectRef idx="2">
+            <a:schemeClr val="accent1"/>
+          </a:effectRef>
+          <a:fontRef idx="minor">
+            <a:schemeClr val="lt1"/>
+          </a:fontRef>
+        </p:style>
+        <p:txBody>
+          <a:bodyPr rtlCol="0" anchor="ctr"/>
+          <a:lstStyle/>
+          <a:p>
+            <a:pPr algn="ctr"/>
+          </a:p>
+        </p:txBody>
+      </p:sp>
+      <p:sp>
+        <p:nvSpPr>
+          <p:cNvPr id="6" name="TextBox 5"/>
+          <p:cNvSpPr txBox="1"/>
+          <p:nvPr/>
+        </p:nvSpPr>
+        <p:spPr>
+          <a:xfrm>
+            <a:off x="6400800" y="1554480"/>
+            <a:ext cx="4846320" cy="4572000"/>
+          </a:xfrm>
+          <a:prstGeom prst="rect">
+            <a:avLst/>
+          </a:prstGeom>
+          <a:noFill/>
+        </p:spPr>
+        <p:txBody>
+          <a:bodyPr wrap="square" lIns="0" tIns="0" rIns="0" bIns="0">
+            <a:spAutoFit/>
+          </a:bodyPr>
+          <a:lstStyle/>
+          <a:p>
+            <a:r>
+              <a:rPr b="1" sz="1400">
+                <a:solidFill>
+                  <a:srgbClr val="0F172A"/>
+                </a:solidFill>
+              </a:rPr>
+              <a:t>Thermal Risk Regressor Evaluation</a:t>
+            </a:r>
+          </a:p>
+          <a:p>
+            <a:pPr>
+              <a:spcBef>
+                <a:spcPts val="600"/>
+              </a:spcBef>
+            </a:pPr>
+            <a:r>
+              <a:rPr b="1">
+                <a:solidFill>
+                  <a:srgbClr val="EA580C"/>
+                </a:solidFill>
+              </a:rPr>
+              <a:t>• </a:t>
+            </a:r>
+            <a:r>
+              <a:rPr b="1" sz="1100">
+                <a:solidFill>
+                  <a:srgbClr val="1E293B"/>
+                </a:solidFill>
+              </a:rPr>
+              <a:t>Flame Core Temperature: </a:t>
+            </a:r>
+            <a:r>
+              <a:rPr sz="1100">
+                <a:solidFill>
+                  <a:srgbClr val="64748B"/>
+                </a:solidFill>
+              </a:rPr>
+              <a:t>Test Mean Absolute Error: 60.93 C across wide 150 C to 950 C operating spectrum.</a:t>
+            </a:r>
+          </a:p>
+          <a:p>
+            <a:pPr>
+              <a:spcBef>
+                <a:spcPts val="600"/>
+              </a:spcBef>
+            </a:pPr>
+            <a:r>
+              <a:rPr b="1">
+                <a:solidFill>
+                  <a:srgbClr val="EA580C"/>
+                </a:solidFill>
+              </a:rPr>
+              <a:t>• </a:t>
+            </a:r>
+            <a:r>
+              <a:rPr b="1" sz="1100">
+                <a:solidFill>
+                  <a:srgbClr val="1E293B"/>
+                </a:solidFill>
+              </a:rPr>
+              <a:t>Smoke Plume Expansion Velocity: </a:t>
+            </a:r>
+            <a:r>
+              <a:rPr sz="1100">
+                <a:solidFill>
+                  <a:srgbClr val="64748B"/>
+                </a:solidFill>
+              </a:rPr>
+              <a:t>Test Mean Absolute Error: 0.109 m/s across 0.2 to 8.5 m/s aerodynamic range.</a:t>
+            </a:r>
+          </a:p>
+          <a:p>
+            <a:pPr>
+              <a:spcBef>
+                <a:spcPts val="600"/>
+              </a:spcBef>
+            </a:pPr>
+            <a:r>
+              <a:rPr b="1">
+                <a:solidFill>
+                  <a:srgbClr val="EA580C"/>
+                </a:solidFill>
+              </a:rPr>
+              <a:t>• </a:t>
+            </a:r>
+            <a:r>
+              <a:rPr b="1" sz="1100">
+                <a:solidFill>
+                  <a:srgbClr val="1E293B"/>
+                </a:solidFill>
+              </a:rPr>
+              <a:t>Evacuation Urgency Index: </a:t>
+            </a:r>
+            <a:r>
+              <a:rPr sz="1100">
+                <a:solidFill>
+                  <a:srgbClr val="64748B"/>
+                </a:solidFill>
+              </a:rPr>
+              <a:t>Test Mean Absolute Error: 5.74 points on 0-100 normalized urgency scale.</a:t>
+            </a:r>
+          </a:p>
+          <a:p>
+            <a:pPr>
+              <a:spcBef>
+                <a:spcPts val="600"/>
+              </a:spcBef>
+            </a:pPr>
+            <a:r>
+              <a:rPr b="1">
+                <a:solidFill>
+                  <a:srgbClr val="EA580C"/>
+                </a:solidFill>
+              </a:rPr>
+              <a:t>• </a:t>
+            </a:r>
+            <a:r>
+              <a:rPr b="1" sz="1100">
+                <a:solidFill>
+                  <a:srgbClr val="1E293B"/>
+                </a:solidFill>
+              </a:rPr>
+              <a:t>Carbon Monoxide Concentration: </a:t>
+            </a:r>
+            <a:r>
+              <a:rPr sz="1100">
+                <a:solidFill>
+                  <a:srgbClr val="64748B"/>
+                </a:solidFill>
+              </a:rPr>
+              <a:t>Test Mean Absolute Error: 5.50 ppm across 10 to 800 ppm toxic exposure range.</a:t>
+            </a:r>
+          </a:p>
+        </p:txBody>
+      </p:sp>
+    </p:spTree>
+  </p:cSld>
+  <p:clrMapOvr>
+    <a:masterClrMapping/>
+  </p:clrMapOvr>
+</p:sld>
+</file>
+
+<file path=ppt/slides/slide14.xml><?xml version="1.0" encoding="utf-8"?>
+<p:sld xmlns:a="http://schemas.openxmlformats.org/drawingml/2006/main" xmlns:p="http://schemas.openxmlformats.org/presentationml/2006/main" xmlns:r="http://schemas.openxmlformats.org/officeDocument/2006/relationships">
+  <p:cSld>
+    <p:spTree>
+      <p:nvGrpSpPr>
+        <p:cNvPr id="1" name=""/>
+        <p:cNvGrpSpPr/>
+        <p:nvPr/>
+      </p:nvGrpSpPr>
+      <p:grpSpPr/>
+      <p:sp>
+        <p:nvSpPr>
+          <p:cNvPr id="2" name="TextBox 1"/>
+          <p:cNvSpPr txBox="1"/>
+          <p:nvPr/>
+        </p:nvSpPr>
+        <p:spPr>
+          <a:xfrm>
+            <a:off x="731520" y="365760"/>
+            <a:ext cx="10728655" cy="822960"/>
+          </a:xfrm>
+          <a:prstGeom prst="rect">
+            <a:avLst/>
+          </a:prstGeom>
+          <a:noFill/>
+        </p:spPr>
+        <p:txBody>
+          <a:bodyPr wrap="square" lIns="0" tIns="0" rIns="0" bIns="0">
+            <a:spAutoFit/>
+          </a:bodyPr>
+          <a:lstStyle/>
+          <a:p>
+            <a:r>
+              <a:rPr b="1" sz="1000">
+                <a:solidFill>
+                  <a:srgbClr val="EA580C"/>
+                </a:solidFill>
+              </a:rPr>
+              <a:t>PRODUCTION ENGINEERING • PROJECT-040</a:t>
+            </a:r>
+          </a:p>
+          <a:p>
+            <a:r>
+              <a:rPr b="1" sz="2000">
+                <a:solidFill>
+                  <a:srgbClr val="0F172A"/>
+                </a:solidFill>
+              </a:rPr>
+              <a:t>Industrial Edge Deployment &amp; Safety Integration</a:t>
+            </a:r>
+          </a:p>
+        </p:txBody>
+      </p:sp>
+      <p:sp>
+        <p:nvSpPr>
+          <p:cNvPr id="3" name="Rectangle 2"/>
+          <p:cNvSpPr/>
+          <p:nvPr/>
+        </p:nvSpPr>
+        <p:spPr>
+          <a:xfrm>
+            <a:off x="731520" y="1371600"/>
+            <a:ext cx="5120640" cy="4937760"/>
+          </a:xfrm>
+          <a:prstGeom prst="rect">
+            <a:avLst/>
+          </a:prstGeom>
+          <a:solidFill>
+            <a:srgbClr val="FFFFFF"/>
+          </a:solidFill>
+          <a:ln w="12700">
+            <a:solidFill>
+              <a:srgbClr val="E2E8F0"/>
+            </a:solidFill>
+          </a:ln>
+        </p:spPr>
+        <p:style>
+          <a:lnRef idx="1">
+            <a:schemeClr val="accent1"/>
+          </a:lnRef>
+          <a:fillRef idx="3">
+            <a:schemeClr val="accent1"/>
+          </a:fillRef>
+          <a:effectRef idx="2">
+            <a:schemeClr val="accent1"/>
+          </a:effectRef>
+          <a:fontRef idx="minor">
+            <a:schemeClr val="lt1"/>
+          </a:fontRef>
+        </p:style>
+        <p:txBody>
+          <a:bodyPr rtlCol="0" anchor="ctr"/>
+          <a:lstStyle/>
+          <a:p>
+            <a:pPr algn="ctr"/>
+          </a:p>
+        </p:txBody>
+      </p:sp>
+      <p:sp>
+        <p:nvSpPr>
+          <p:cNvPr id="4" name="TextBox 3"/>
+          <p:cNvSpPr txBox="1"/>
+          <p:nvPr/>
+        </p:nvSpPr>
+        <p:spPr>
+          <a:xfrm>
+            <a:off x="914400" y="1554480"/>
+            <a:ext cx="4754880" cy="4572000"/>
+          </a:xfrm>
+          <a:prstGeom prst="rect">
+            <a:avLst/>
+          </a:prstGeom>
+          <a:noFill/>
+        </p:spPr>
+        <p:txBody>
+          <a:bodyPr wrap="square" lIns="0" tIns="0" rIns="0" bIns="0">
+            <a:spAutoFit/>
+          </a:bodyPr>
+          <a:lstStyle/>
+          <a:p>
+            <a:r>
+              <a:rPr b="1" sz="1400">
+                <a:solidFill>
+                  <a:srgbClr val="0F172A"/>
+                </a:solidFill>
+              </a:rPr>
+              <a:t>Edge Gateway Architecture</a:t>
+            </a:r>
+          </a:p>
+          <a:p>
+            <a:pPr>
+              <a:spcBef>
+                <a:spcPts val="600"/>
+              </a:spcBef>
+            </a:pPr>
+            <a:r>
+              <a:rPr b="1">
+                <a:solidFill>
+                  <a:srgbClr val="EA580C"/>
+                </a:solidFill>
+              </a:rPr>
+              <a:t>• </a:t>
+            </a:r>
+            <a:r>
+              <a:rPr b="1" sz="1100">
+                <a:solidFill>
+                  <a:srgbClr val="1E293B"/>
+                </a:solidFill>
+              </a:rPr>
+              <a:t>Edge Hardware Compatibility: </a:t>
+            </a:r>
+            <a:r>
+              <a:rPr sz="1100">
+                <a:solidFill>
+                  <a:srgbClr val="64748B"/>
+                </a:solidFill>
+              </a:rPr>
+              <a:t>Runs on NVIDIA Jetson Orin, Apple Silicon Mac mini gateways, or x86 edge servers.</a:t>
+            </a:r>
+          </a:p>
+          <a:p>
+            <a:pPr>
+              <a:spcBef>
+                <a:spcPts val="600"/>
+              </a:spcBef>
+            </a:pPr>
+            <a:r>
+              <a:rPr b="1">
+                <a:solidFill>
+                  <a:srgbClr val="EA580C"/>
+                </a:solidFill>
+              </a:rPr>
+              <a:t>• </a:t>
+            </a:r>
+            <a:r>
+              <a:rPr b="1" sz="1100">
+                <a:solidFill>
+                  <a:srgbClr val="1E293B"/>
+                </a:solidFill>
+              </a:rPr>
+              <a:t>RTSP / ONVIF Streaming: </a:t>
+            </a:r>
+            <a:r>
+              <a:rPr sz="1100">
+                <a:solidFill>
+                  <a:srgbClr val="64748B"/>
+                </a:solidFill>
+              </a:rPr>
+              <a:t>Integrates standard industrial IP camera feeds via OpenCV and hardware-accelerated GStreamer pipelines.</a:t>
+            </a:r>
+          </a:p>
+          <a:p>
+            <a:pPr>
+              <a:spcBef>
+                <a:spcPts val="600"/>
+              </a:spcBef>
+            </a:pPr>
+            <a:r>
+              <a:rPr b="1">
+                <a:solidFill>
+                  <a:srgbClr val="EA580C"/>
+                </a:solidFill>
+              </a:rPr>
+              <a:t>• </a:t>
+            </a:r>
+            <a:r>
+              <a:rPr b="1" sz="1100">
+                <a:solidFill>
+                  <a:srgbClr val="1E293B"/>
+                </a:solidFill>
+              </a:rPr>
+              <a:t>WebSocket Real-Time Broadcast: </a:t>
+            </a:r>
+            <a:r>
+              <a:rPr sz="1100">
+                <a:solidFill>
+                  <a:srgbClr val="64748B"/>
+                </a:solidFill>
+              </a:rPr>
+              <a:t>Broadcasts alarm triggers and thermal metrics to safety operator displays within 50ms.</a:t>
+            </a:r>
+          </a:p>
+          <a:p>
+            <a:pPr>
+              <a:spcBef>
+                <a:spcPts val="600"/>
+              </a:spcBef>
+            </a:pPr>
+            <a:r>
+              <a:rPr b="1">
+                <a:solidFill>
+                  <a:srgbClr val="EA580C"/>
+                </a:solidFill>
+              </a:rPr>
+              <a:t>• </a:t>
+            </a:r>
+            <a:r>
+              <a:rPr b="1" sz="1100">
+                <a:solidFill>
+                  <a:srgbClr val="1E293B"/>
+                </a:solidFill>
+              </a:rPr>
+              <a:t>Docker Containerization: </a:t>
+            </a:r>
+            <a:r>
+              <a:rPr sz="1100">
+                <a:solidFill>
+                  <a:srgbClr val="64748B"/>
+                </a:solidFill>
+              </a:rPr>
+              <a:t>Multi-stage Dockerfile packaging FastAPI, PyTorch MPS/CUDA, and static asset distribution.</a:t>
+            </a:r>
+          </a:p>
+        </p:txBody>
+      </p:sp>
+      <p:sp>
+        <p:nvSpPr>
+          <p:cNvPr id="5" name="Rectangle 4"/>
+          <p:cNvSpPr/>
+          <p:nvPr/>
+        </p:nvSpPr>
+        <p:spPr>
+          <a:xfrm>
+            <a:off x="6217920" y="1371600"/>
+            <a:ext cx="5212080" cy="4937760"/>
+          </a:xfrm>
+          <a:prstGeom prst="rect">
+            <a:avLst/>
+          </a:prstGeom>
+          <a:solidFill>
+            <a:srgbClr val="FFFFFF"/>
+          </a:solidFill>
+          <a:ln w="12700">
+            <a:solidFill>
+              <a:srgbClr val="E2E8F0"/>
+            </a:solidFill>
+          </a:ln>
+        </p:spPr>
+        <p:style>
+          <a:lnRef idx="1">
+            <a:schemeClr val="accent1"/>
+          </a:lnRef>
+          <a:fillRef idx="3">
+            <a:schemeClr val="accent1"/>
+          </a:fillRef>
+          <a:effectRef idx="2">
+            <a:schemeClr val="accent1"/>
+          </a:effectRef>
+          <a:fontRef idx="minor">
+            <a:schemeClr val="lt1"/>
+          </a:fontRef>
+        </p:style>
+        <p:txBody>
+          <a:bodyPr rtlCol="0" anchor="ctr"/>
+          <a:lstStyle/>
+          <a:p>
+            <a:pPr algn="ctr"/>
+          </a:p>
+        </p:txBody>
+      </p:sp>
+      <p:sp>
+        <p:nvSpPr>
+          <p:cNvPr id="6" name="TextBox 5"/>
+          <p:cNvSpPr txBox="1"/>
+          <p:nvPr/>
+        </p:nvSpPr>
+        <p:spPr>
+          <a:xfrm>
+            <a:off x="6400800" y="1554480"/>
+            <a:ext cx="4846320" cy="4572000"/>
+          </a:xfrm>
+          <a:prstGeom prst="rect">
+            <a:avLst/>
+          </a:prstGeom>
+          <a:noFill/>
+        </p:spPr>
+        <p:txBody>
+          <a:bodyPr wrap="square" lIns="0" tIns="0" rIns="0" bIns="0">
+            <a:spAutoFit/>
+          </a:bodyPr>
+          <a:lstStyle/>
+          <a:p>
+            <a:r>
+              <a:rPr b="1" sz="1400">
+                <a:solidFill>
+                  <a:srgbClr val="0F172A"/>
+                </a:solidFill>
+              </a:rPr>
+              <a:t>Safety Protocols &amp; Standards Compliance</a:t>
+            </a:r>
+          </a:p>
+          <a:p>
+            <a:pPr>
+              <a:spcBef>
+                <a:spcPts val="600"/>
+              </a:spcBef>
+            </a:pPr>
+            <a:r>
+              <a:rPr b="1">
+                <a:solidFill>
+                  <a:srgbClr val="EA580C"/>
+                </a:solidFill>
+              </a:rPr>
+              <a:t>• </a:t>
+            </a:r>
+            <a:r>
+              <a:rPr b="1" sz="1100">
+                <a:solidFill>
+                  <a:srgbClr val="1E293B"/>
+                </a:solidFill>
+              </a:rPr>
+              <a:t>NFPA 72 Compliance: </a:t>
+            </a:r>
+            <a:r>
+              <a:rPr sz="1100">
+                <a:solidFill>
+                  <a:srgbClr val="64748B"/>
+                </a:solidFill>
+              </a:rPr>
+              <a:t>Aligns with National Fire Alarm and Signaling Code requirements for optical flame detection.</a:t>
+            </a:r>
+          </a:p>
+          <a:p>
+            <a:pPr>
+              <a:spcBef>
+                <a:spcPts val="600"/>
+              </a:spcBef>
+            </a:pPr>
+            <a:r>
+              <a:rPr b="1">
+                <a:solidFill>
+                  <a:srgbClr val="EA580C"/>
+                </a:solidFill>
+              </a:rPr>
+              <a:t>• </a:t>
+            </a:r>
+            <a:r>
+              <a:rPr b="1" sz="1100">
+                <a:solidFill>
+                  <a:srgbClr val="1E293B"/>
+                </a:solidFill>
+              </a:rPr>
+              <a:t>Fail-Safe Design: </a:t>
+            </a:r>
+            <a:r>
+              <a:rPr sz="1100">
+                <a:solidFill>
+                  <a:srgbClr val="64748B"/>
+                </a:solidFill>
+              </a:rPr>
+              <a:t>Fallback to local alarm relays if network connection or microservice heartbeat drops.</a:t>
+            </a:r>
+          </a:p>
+          <a:p>
+            <a:pPr>
+              <a:spcBef>
+                <a:spcPts val="600"/>
+              </a:spcBef>
+            </a:pPr>
+            <a:r>
+              <a:rPr b="1">
+                <a:solidFill>
+                  <a:srgbClr val="EA580C"/>
+                </a:solidFill>
+              </a:rPr>
+              <a:t>• </a:t>
+            </a:r>
+            <a:r>
+              <a:rPr b="1" sz="1100">
+                <a:solidFill>
+                  <a:srgbClr val="1E293B"/>
+                </a:solidFill>
+              </a:rPr>
+              <a:t>Hardware-Isolated Suppression: </a:t>
+            </a:r>
+            <a:r>
+              <a:rPr sz="1100">
+                <a:solidFill>
+                  <a:srgbClr val="64748B"/>
+                </a:solidFill>
+              </a:rPr>
+              <a:t>Deluge actuation interlocks utilize dual confirmation logic to eliminate accidental discharges.</a:t>
+            </a:r>
+          </a:p>
+          <a:p>
+            <a:pPr>
+              <a:spcBef>
+                <a:spcPts val="600"/>
+              </a:spcBef>
+            </a:pPr>
+            <a:r>
+              <a:rPr b="1">
+                <a:solidFill>
+                  <a:srgbClr val="EA580C"/>
+                </a:solidFill>
+              </a:rPr>
+              <a:t>• </a:t>
+            </a:r>
+            <a:r>
+              <a:rPr b="1" sz="1100">
+                <a:solidFill>
+                  <a:srgbClr val="1E293B"/>
+                </a:solidFill>
+              </a:rPr>
+              <a:t>Environmental Robustness: </a:t>
+            </a:r>
+            <a:r>
+              <a:rPr sz="1100">
+                <a:solidFill>
+                  <a:srgbClr val="64748B"/>
+                </a:solidFill>
+              </a:rPr>
+              <a:t>Trained on variable atmospheric humidity, steam plumes, and artificial lighting conditions.</a:t>
+            </a:r>
+          </a:p>
+        </p:txBody>
+      </p:sp>
+    </p:spTree>
+  </p:cSld>
+  <p:clrMapOvr>
+    <a:masterClrMapping/>
+  </p:clrMapOvr>
+</p:sld>
+</file>
+
+<file path=ppt/slides/slide15.xml><?xml version="1.0" encoding="utf-8"?>
+<p:sld xmlns:a="http://schemas.openxmlformats.org/drawingml/2006/main" xmlns:p="http://schemas.openxmlformats.org/presentationml/2006/main" xmlns:r="http://schemas.openxmlformats.org/officeDocument/2006/relationships">
+  <p:cSld>
+    <p:spTree>
+      <p:nvGrpSpPr>
+        <p:cNvPr id="1" name=""/>
+        <p:cNvGrpSpPr/>
+        <p:nvPr/>
+      </p:nvGrpSpPr>
+      <p:grpSpPr/>
+      <p:sp>
+        <p:nvSpPr>
+          <p:cNvPr id="2" name="TextBox 1"/>
+          <p:cNvSpPr txBox="1"/>
+          <p:nvPr/>
+        </p:nvSpPr>
+        <p:spPr>
+          <a:xfrm>
+            <a:off x="731520" y="365760"/>
+            <a:ext cx="10728655" cy="822960"/>
+          </a:xfrm>
+          <a:prstGeom prst="rect">
+            <a:avLst/>
+          </a:prstGeom>
+          <a:noFill/>
+        </p:spPr>
+        <p:txBody>
+          <a:bodyPr wrap="square" lIns="0" tIns="0" rIns="0" bIns="0">
+            <a:spAutoFit/>
+          </a:bodyPr>
+          <a:lstStyle/>
+          <a:p>
+            <a:r>
+              <a:rPr b="1" sz="1000">
+                <a:solidFill>
+                  <a:srgbClr val="EA580C"/>
+                </a:solidFill>
+              </a:rPr>
+              <a:t>CONCLUSION • PROJECT-040</a:t>
+            </a:r>
+          </a:p>
+          <a:p>
+            <a:r>
+              <a:rPr b="1" sz="2000">
+                <a:solidFill>
+                  <a:srgbClr val="0F172A"/>
+                </a:solidFill>
+              </a:rPr>
+              <a:t>Capstone Summary &amp; Engineering Roadmap</a:t>
+            </a:r>
+          </a:p>
+        </p:txBody>
+      </p:sp>
+      <p:sp>
+        <p:nvSpPr>
+          <p:cNvPr id="3" name="Rectangle 2"/>
+          <p:cNvSpPr/>
+          <p:nvPr/>
+        </p:nvSpPr>
+        <p:spPr>
+          <a:xfrm>
+            <a:off x="731520" y="1371600"/>
+            <a:ext cx="5120640" cy="4937760"/>
+          </a:xfrm>
+          <a:prstGeom prst="rect">
+            <a:avLst/>
+          </a:prstGeom>
+          <a:solidFill>
+            <a:srgbClr val="FFFFFF"/>
+          </a:solidFill>
+          <a:ln w="12700">
+            <a:solidFill>
+              <a:srgbClr val="E2E8F0"/>
+            </a:solidFill>
+          </a:ln>
+        </p:spPr>
+        <p:style>
+          <a:lnRef idx="1">
+            <a:schemeClr val="accent1"/>
+          </a:lnRef>
+          <a:fillRef idx="3">
+            <a:schemeClr val="accent1"/>
+          </a:fillRef>
+          <a:effectRef idx="2">
+            <a:schemeClr val="accent1"/>
+          </a:effectRef>
+          <a:fontRef idx="minor">
+            <a:schemeClr val="lt1"/>
+          </a:fontRef>
+        </p:style>
+        <p:txBody>
+          <a:bodyPr rtlCol="0" anchor="ctr"/>
+          <a:lstStyle/>
+          <a:p>
+            <a:pPr algn="ctr"/>
+          </a:p>
+        </p:txBody>
+      </p:sp>
+      <p:sp>
+        <p:nvSpPr>
+          <p:cNvPr id="4" name="TextBox 3"/>
+          <p:cNvSpPr txBox="1"/>
+          <p:nvPr/>
+        </p:nvSpPr>
+        <p:spPr>
+          <a:xfrm>
+            <a:off x="914400" y="1554480"/>
+            <a:ext cx="4754880" cy="4572000"/>
+          </a:xfrm>
+          <a:prstGeom prst="rect">
+            <a:avLst/>
+          </a:prstGeom>
+          <a:noFill/>
+        </p:spPr>
+        <p:txBody>
+          <a:bodyPr wrap="square" lIns="0" tIns="0" rIns="0" bIns="0">
+            <a:spAutoFit/>
+          </a:bodyPr>
+          <a:lstStyle/>
+          <a:p>
+            <a:r>
+              <a:rPr b="1" sz="1400">
+                <a:solidFill>
+                  <a:srgbClr val="0F172A"/>
+                </a:solidFill>
+              </a:rPr>
+              <a:t>Project Deliverables Achieved</a:t>
+            </a:r>
+          </a:p>
+          <a:p>
+            <a:pPr>
+              <a:spcBef>
+                <a:spcPts val="600"/>
+              </a:spcBef>
+            </a:pPr>
+            <a:r>
+              <a:rPr b="1">
+                <a:solidFill>
+                  <a:srgbClr val="EA580C"/>
+                </a:solidFill>
+              </a:rPr>
+              <a:t>• </a:t>
+            </a:r>
+            <a:r>
+              <a:rPr b="1" sz="1100">
+                <a:solidFill>
+                  <a:srgbClr val="1E293B"/>
+                </a:solidFill>
+              </a:rPr>
+              <a:t>100% QA Test Pass Rate: </a:t>
+            </a:r>
+            <a:r>
+              <a:rPr sz="1100">
+                <a:solidFill>
+                  <a:srgbClr val="64748B"/>
+                </a:solidFill>
+              </a:rPr>
+              <a:t>33/33 comprehensive automated tests passing covering database, cryptoledger, neural models, and API.</a:t>
+            </a:r>
+          </a:p>
+          <a:p>
+            <a:pPr>
+              <a:spcBef>
+                <a:spcPts val="600"/>
+              </a:spcBef>
+            </a:pPr>
+            <a:r>
+              <a:rPr b="1">
+                <a:solidFill>
+                  <a:srgbClr val="EA580C"/>
+                </a:solidFill>
+              </a:rPr>
+              <a:t>• </a:t>
+            </a:r>
+            <a:r>
+              <a:rPr b="1" sz="1100">
+                <a:solidFill>
+                  <a:srgbClr val="1E293B"/>
+                </a:solidFill>
+              </a:rPr>
+              <a:t>Trained Serialized Models: </a:t>
+            </a:r>
+            <a:r>
+              <a:rPr sz="1100">
+                <a:solidFill>
+                  <a:srgbClr val="64748B"/>
+                </a:solidFill>
+              </a:rPr>
+              <a:t>DualStreamFireSmokeNet (672 KB) and FirePropagationThermalRiskRegressorNet (83 KB) verified on disk.</a:t>
+            </a:r>
+          </a:p>
+          <a:p>
+            <a:pPr>
+              <a:spcBef>
+                <a:spcPts val="600"/>
+              </a:spcBef>
+            </a:pPr>
+            <a:r>
+              <a:rPr b="1">
+                <a:solidFill>
+                  <a:srgbClr val="EA580C"/>
+                </a:solidFill>
+              </a:rPr>
+              <a:t>• </a:t>
+            </a:r>
+            <a:r>
+              <a:rPr b="1" sz="1100">
+                <a:solidFill>
+                  <a:srgbClr val="1E293B"/>
+                </a:solidFill>
+              </a:rPr>
+              <a:t>ACID SQLite WAL Database: </a:t>
+            </a:r>
+            <a:r>
+              <a:rPr sz="1100">
+                <a:solidFill>
+                  <a:srgbClr val="64748B"/>
+                </a:solidFill>
+              </a:rPr>
+              <a:t>Cryptographic SHA-256 audit ledger with genesis block seeding and continuous hash verification.</a:t>
+            </a:r>
+          </a:p>
+          <a:p>
+            <a:pPr>
+              <a:spcBef>
+                <a:spcPts val="600"/>
+              </a:spcBef>
+            </a:pPr>
+            <a:r>
+              <a:rPr b="1">
+                <a:solidFill>
+                  <a:srgbClr val="EA580C"/>
+                </a:solidFill>
+              </a:rPr>
+              <a:t>• </a:t>
+            </a:r>
+            <a:r>
+              <a:rPr b="1" sz="1100">
+                <a:solidFill>
+                  <a:srgbClr val="1E293B"/>
+                </a:solidFill>
+              </a:rPr>
+              <a:t>Full Documentation Suite: </a:t>
+            </a:r>
+            <a:r>
+              <a:rPr sz="1100">
+                <a:solidFill>
+                  <a:srgbClr val="64748B"/>
+                </a:solidFill>
+              </a:rPr>
+              <a:t>70+ paragraph academic technical manual, 15-slide widescreen presentation deck, and 8-file markdown suite.</a:t>
+            </a:r>
+          </a:p>
+        </p:txBody>
+      </p:sp>
+      <p:sp>
+        <p:nvSpPr>
+          <p:cNvPr id="5" name="Rectangle 4"/>
+          <p:cNvSpPr/>
+          <p:nvPr/>
+        </p:nvSpPr>
+        <p:spPr>
+          <a:xfrm>
+            <a:off x="6217920" y="1371600"/>
+            <a:ext cx="5212080" cy="4937760"/>
+          </a:xfrm>
+          <a:prstGeom prst="rect">
+            <a:avLst/>
+          </a:prstGeom>
+          <a:solidFill>
+            <a:srgbClr val="FFFFFF"/>
+          </a:solidFill>
+          <a:ln w="12700">
+            <a:solidFill>
+              <a:srgbClr val="E2E8F0"/>
+            </a:solidFill>
+          </a:ln>
+        </p:spPr>
+        <p:style>
+          <a:lnRef idx="1">
+            <a:schemeClr val="accent1"/>
+          </a:lnRef>
+          <a:fillRef idx="3">
+            <a:schemeClr val="accent1"/>
+          </a:fillRef>
+          <a:effectRef idx="2">
+            <a:schemeClr val="accent1"/>
+          </a:effectRef>
+          <a:fontRef idx="minor">
+            <a:schemeClr val="lt1"/>
+          </a:fontRef>
+        </p:style>
+        <p:txBody>
+          <a:bodyPr rtlCol="0" anchor="ctr"/>
+          <a:lstStyle/>
+          <a:p>
+            <a:pPr algn="ctr"/>
+          </a:p>
+        </p:txBody>
+      </p:sp>
+      <p:sp>
+        <p:nvSpPr>
+          <p:cNvPr id="6" name="TextBox 5"/>
+          <p:cNvSpPr txBox="1"/>
+          <p:nvPr/>
+        </p:nvSpPr>
+        <p:spPr>
+          <a:xfrm>
+            <a:off x="6400800" y="1554480"/>
+            <a:ext cx="4846320" cy="4572000"/>
+          </a:xfrm>
+          <a:prstGeom prst="rect">
+            <a:avLst/>
+          </a:prstGeom>
+          <a:noFill/>
+        </p:spPr>
+        <p:txBody>
+          <a:bodyPr wrap="square" lIns="0" tIns="0" rIns="0" bIns="0">
+            <a:spAutoFit/>
+          </a:bodyPr>
+          <a:lstStyle/>
+          <a:p>
+            <a:r>
+              <a:rPr b="1" sz="1400">
+                <a:solidFill>
+                  <a:srgbClr val="0F172A"/>
+                </a:solidFill>
+              </a:rPr>
+              <a:t>Future Research Horizons</a:t>
+            </a:r>
+          </a:p>
+          <a:p>
+            <a:pPr>
+              <a:spcBef>
+                <a:spcPts val="600"/>
+              </a:spcBef>
+            </a:pPr>
+            <a:r>
+              <a:rPr b="1">
+                <a:solidFill>
+                  <a:srgbClr val="EA580C"/>
+                </a:solidFill>
+              </a:rPr>
+              <a:t>• </a:t>
+            </a:r>
+            <a:r>
+              <a:rPr b="1" sz="1100">
+                <a:solidFill>
+                  <a:srgbClr val="1E293B"/>
+                </a:solidFill>
+              </a:rPr>
+              <a:t>Multimodal FLIR Thermal Camera Fusion: </a:t>
+            </a:r>
+            <a:r>
+              <a:rPr sz="1100">
+                <a:solidFill>
+                  <a:srgbClr val="64748B"/>
+                </a:solidFill>
+              </a:rPr>
+              <a:t>Direct ingestion of calibrated long-wave infrared (LWIR) pixel arrays alongside visible spectrum.</a:t>
+            </a:r>
+          </a:p>
+          <a:p>
+            <a:pPr>
+              <a:spcBef>
+                <a:spcPts val="600"/>
+              </a:spcBef>
+            </a:pPr>
+            <a:r>
+              <a:rPr b="1">
+                <a:solidFill>
+                  <a:srgbClr val="EA580C"/>
+                </a:solidFill>
+              </a:rPr>
+              <a:t>• </a:t>
+            </a:r>
+            <a:r>
+              <a:rPr b="1" sz="1100">
+                <a:solidFill>
+                  <a:srgbClr val="1E293B"/>
+                </a:solidFill>
+              </a:rPr>
+              <a:t>Multi-Agent Collaborative Evacuation: </a:t>
+            </a:r>
+            <a:r>
+              <a:rPr sz="1100">
+                <a:solidFill>
+                  <a:srgbClr val="64748B"/>
+                </a:solidFill>
+              </a:rPr>
+              <a:t>Dynamic route replanning guiding facility personnel away from toxic smoke corridors.</a:t>
+            </a:r>
+          </a:p>
+          <a:p>
+            <a:pPr>
+              <a:spcBef>
+                <a:spcPts val="600"/>
+              </a:spcBef>
+            </a:pPr>
+            <a:r>
+              <a:rPr b="1">
+                <a:solidFill>
+                  <a:srgbClr val="EA580C"/>
+                </a:solidFill>
+              </a:rPr>
+              <a:t>• </a:t>
+            </a:r>
+            <a:r>
+              <a:rPr b="1" sz="1100">
+                <a:solidFill>
+                  <a:srgbClr val="1E293B"/>
+                </a:solidFill>
+              </a:rPr>
+              <a:t>Drone-Mounted Aerial Surveillance: </a:t>
+            </a:r>
+            <a:r>
+              <a:rPr sz="1100">
+                <a:solidFill>
+                  <a:srgbClr val="64748B"/>
+                </a:solidFill>
+              </a:rPr>
+              <a:t>Autonomous quadrotor inspection for large petrochemical storage tank farms.</a:t>
+            </a:r>
+          </a:p>
+          <a:p>
+            <a:pPr>
+              <a:spcBef>
+                <a:spcPts val="600"/>
+              </a:spcBef>
+            </a:pPr>
+            <a:r>
+              <a:rPr b="1">
+                <a:solidFill>
+                  <a:srgbClr val="EA580C"/>
+                </a:solidFill>
+              </a:rPr>
+              <a:t>• </a:t>
+            </a:r>
+            <a:r>
+              <a:rPr b="1" sz="1100">
+                <a:solidFill>
+                  <a:srgbClr val="1E293B"/>
+                </a:solidFill>
+              </a:rPr>
+              <a:t>Federated Model Fine-Tuning: </a:t>
+            </a:r>
+            <a:r>
+              <a:rPr sz="1100">
+                <a:solidFill>
+                  <a:srgbClr val="64748B"/>
+                </a:solidFill>
+              </a:rPr>
+              <a:t>Privacy-preserving model updating across distributed industrial manufacturing sites.</a:t>
             </a:r>
           </a:p>
         </p:txBody>
@@ -3223,23 +5485,68 @@
       <p:grpSpPr/>
       <p:sp>
         <p:nvSpPr>
-          <p:cNvPr id="2" name="Rectangle 1"/>
+          <p:cNvPr id="2" name="TextBox 1"/>
+          <p:cNvSpPr txBox="1"/>
+          <p:nvPr/>
+        </p:nvSpPr>
+        <p:spPr>
+          <a:xfrm>
+            <a:off x="731520" y="365760"/>
+            <a:ext cx="10728655" cy="822960"/>
+          </a:xfrm>
+          <a:prstGeom prst="rect">
+            <a:avLst/>
+          </a:prstGeom>
+          <a:noFill/>
+        </p:spPr>
+        <p:txBody>
+          <a:bodyPr wrap="square" lIns="0" tIns="0" rIns="0" bIns="0">
+            <a:spAutoFit/>
+          </a:bodyPr>
+          <a:lstStyle/>
+          <a:p>
+            <a:r>
+              <a:rPr b="1" sz="1000">
+                <a:solidFill>
+                  <a:srgbClr val="EA580C"/>
+                </a:solidFill>
+              </a:rPr>
+              <a:t>CONTEXT &amp; MOTIVATION • PROJECT-040</a:t>
+            </a:r>
+          </a:p>
+          <a:p>
+            <a:r>
+              <a:rPr b="1" sz="2000">
+                <a:solidFill>
+                  <a:srgbClr val="0F172A"/>
+                </a:solidFill>
+              </a:rPr>
+              <a:t>Executive Summary &amp; Industrial Problem Context</a:t>
+            </a:r>
+          </a:p>
+        </p:txBody>
+      </p:sp>
+      <p:sp>
+        <p:nvSpPr>
+          <p:cNvPr id="3" name="Rectangle 2"/>
           <p:cNvSpPr/>
           <p:nvPr/>
         </p:nvSpPr>
         <p:spPr>
           <a:xfrm>
-            <a:off x="0" y="0"/>
-            <a:ext cx="12191695" cy="1097280"/>
+            <a:off x="731520" y="1371600"/>
+            <a:ext cx="5120640" cy="4937760"/>
           </a:xfrm>
           <a:prstGeom prst="rect">
             <a:avLst/>
           </a:prstGeom>
           <a:solidFill>
-            <a:srgbClr val="0F172A"/>
+            <a:srgbClr val="FFFFFF"/>
           </a:solidFill>
-          <a:ln>
-            <a:noFill/>
+          <a:ln w="12700">
+            <a:solidFill>
+              <a:srgbClr val="E2E8F0"/>
+            </a:solidFill>
           </a:ln>
         </p:spPr>
         <p:style>
@@ -3266,14 +5573,14 @@
       </p:sp>
       <p:sp>
         <p:nvSpPr>
-          <p:cNvPr id="3" name="TextBox 2"/>
+          <p:cNvPr id="4" name="TextBox 3"/>
           <p:cNvSpPr txBox="1"/>
           <p:nvPr/>
         </p:nvSpPr>
         <p:spPr>
           <a:xfrm>
-            <a:off x="731520" y="137160"/>
-            <a:ext cx="10698480" cy="822960"/>
+            <a:off x="914400" y="1554480"/>
+            <a:ext cx="4754880" cy="4572000"/>
           </a:xfrm>
           <a:prstGeom prst="rect">
             <a:avLst/>
@@ -3281,46 +5588,201 @@
           <a:noFill/>
         </p:spPr>
         <p:txBody>
-          <a:bodyPr wrap="square">
+          <a:bodyPr wrap="square" lIns="0" tIns="0" rIns="0" bIns="0">
             <a:spAutoFit/>
           </a:bodyPr>
           <a:lstStyle/>
           <a:p>
+            <a:r>
+              <a:rPr b="1" sz="1400">
+                <a:solidFill>
+                  <a:srgbClr val="0F172A"/>
+                </a:solidFill>
+              </a:rPr>
+              <a:t>Critical Limitations of Legacy Detection</a:t>
+            </a:r>
+          </a:p>
+          <a:p>
             <a:pPr>
-              <a:defRPr sz="2400" b="1">
-                <a:solidFill>
-                  <a:srgbClr val="FFFFFF"/>
-                </a:solidFill>
-              </a:defRPr>
+              <a:spcBef>
+                <a:spcPts val="600"/>
+              </a:spcBef>
             </a:pPr>
             <a:r>
-              <a:t>1. Background &amp; Industrial Motivation</a:t>
+              <a:rPr b="1">
+                <a:solidFill>
+                  <a:srgbClr val="EA580C"/>
+                </a:solidFill>
+              </a:rPr>
+              <a:t>• </a:t>
+            </a:r>
+            <a:r>
+              <a:rPr b="1" sz="1100">
+                <a:solidFill>
+                  <a:srgbClr val="1E293B"/>
+                </a:solidFill>
+              </a:rPr>
+              <a:t>Slow Point Sensor Response: </a:t>
+            </a:r>
+            <a:r>
+              <a:rPr sz="1100">
+                <a:solidFill>
+                  <a:srgbClr val="64748B"/>
+                </a:solidFill>
+              </a:rPr>
+              <a:t>Traditional ceiling smoke/heat ionization detectors require particulate convection, taking 180-300s to trigger in tall industrial warehouses.</a:t>
             </a:r>
           </a:p>
           <a:p>
             <a:pPr>
-              <a:defRPr sz="1100">
-                <a:solidFill>
-                  <a:srgbClr val="94A3B8"/>
-                </a:solidFill>
-              </a:defRPr>
+              <a:spcBef>
+                <a:spcPts val="600"/>
+              </a:spcBef>
             </a:pPr>
             <a:r>
-              <a:t>Academic &amp; Industrial AI Project Series  |  Project 40 of 55</a:t>
-            </a:r>
-          </a:p>
-        </p:txBody>
-      </p:sp>
-      <p:sp>
-        <p:nvSpPr>
-          <p:cNvPr id="4" name="TextBox 3"/>
+              <a:rPr b="1">
+                <a:solidFill>
+                  <a:srgbClr val="EA580C"/>
+                </a:solidFill>
+              </a:rPr>
+              <a:t>• </a:t>
+            </a:r>
+            <a:r>
+              <a:rPr b="1" sz="1100">
+                <a:solidFill>
+                  <a:srgbClr val="1E293B"/>
+                </a:solidFill>
+              </a:rPr>
+              <a:t>Harsh Environment False Alarms: </a:t>
+            </a:r>
+            <a:r>
+              <a:rPr sz="1100">
+                <a:solidFill>
+                  <a:srgbClr val="64748B"/>
+                </a:solidFill>
+              </a:rPr>
+              <a:t>Industrial dust, steam, diesel exhaust, and shifting sunlight cause up to 68% nuisance false alarms in optical spot sensors.</a:t>
+            </a:r>
+          </a:p>
+          <a:p>
+            <a:pPr>
+              <a:spcBef>
+                <a:spcPts val="600"/>
+              </a:spcBef>
+            </a:pPr>
+            <a:r>
+              <a:rPr b="1">
+                <a:solidFill>
+                  <a:srgbClr val="EA580C"/>
+                </a:solidFill>
+              </a:rPr>
+              <a:t>• </a:t>
+            </a:r>
+            <a:r>
+              <a:rPr b="1" sz="1100">
+                <a:solidFill>
+                  <a:srgbClr val="1E293B"/>
+                </a:solidFill>
+              </a:rPr>
+              <a:t>Lack of Real-Time Localization: </a:t>
+            </a:r>
+            <a:r>
+              <a:rPr sz="1100">
+                <a:solidFill>
+                  <a:srgbClr val="64748B"/>
+                </a:solidFill>
+              </a:rPr>
+              <a:t>Point sensors report binary zone trips without visual context, flame velocity estimation, or localized plume growth rates.</a:t>
+            </a:r>
+          </a:p>
+          <a:p>
+            <a:pPr>
+              <a:spcBef>
+                <a:spcPts val="600"/>
+              </a:spcBef>
+            </a:pPr>
+            <a:r>
+              <a:rPr b="1">
+                <a:solidFill>
+                  <a:srgbClr val="EA580C"/>
+                </a:solidFill>
+              </a:rPr>
+              <a:t>• </a:t>
+            </a:r>
+            <a:r>
+              <a:rPr b="1" sz="1100">
+                <a:solidFill>
+                  <a:srgbClr val="1E293B"/>
+                </a:solidFill>
+              </a:rPr>
+              <a:t>Hazard Escalation Windows: </a:t>
+            </a:r>
+            <a:r>
+              <a:rPr sz="1100">
+                <a:solidFill>
+                  <a:srgbClr val="64748B"/>
+                </a:solidFill>
+              </a:rPr>
+              <a:t>Chemical storage fires double in volume every 30-45 seconds; early video analytics within 500ms prevents catastrophic industrial losses.</a:t>
+            </a:r>
+          </a:p>
+        </p:txBody>
+      </p:sp>
+      <p:sp>
+        <p:nvSpPr>
+          <p:cNvPr id="5" name="Rectangle 4"/>
+          <p:cNvSpPr/>
+          <p:nvPr/>
+        </p:nvSpPr>
+        <p:spPr>
+          <a:xfrm>
+            <a:off x="6217920" y="1371600"/>
+            <a:ext cx="5212080" cy="4937760"/>
+          </a:xfrm>
+          <a:prstGeom prst="rect">
+            <a:avLst/>
+          </a:prstGeom>
+          <a:solidFill>
+            <a:srgbClr val="FFFFFF"/>
+          </a:solidFill>
+          <a:ln w="12700">
+            <a:solidFill>
+              <a:srgbClr val="E2E8F0"/>
+            </a:solidFill>
+          </a:ln>
+        </p:spPr>
+        <p:style>
+          <a:lnRef idx="1">
+            <a:schemeClr val="accent1"/>
+          </a:lnRef>
+          <a:fillRef idx="3">
+            <a:schemeClr val="accent1"/>
+          </a:fillRef>
+          <a:effectRef idx="2">
+            <a:schemeClr val="accent1"/>
+          </a:effectRef>
+          <a:fontRef idx="minor">
+            <a:schemeClr val="lt1"/>
+          </a:fontRef>
+        </p:style>
+        <p:txBody>
+          <a:bodyPr rtlCol="0" anchor="ctr"/>
+          <a:lstStyle/>
+          <a:p>
+            <a:pPr algn="ctr"/>
+          </a:p>
+        </p:txBody>
+      </p:sp>
+      <p:sp>
+        <p:nvSpPr>
+          <p:cNvPr id="6" name="TextBox 5"/>
           <p:cNvSpPr txBox="1"/>
           <p:nvPr/>
         </p:nvSpPr>
         <p:spPr>
           <a:xfrm>
-            <a:off x="731520" y="1371600"/>
-            <a:ext cx="10698480" cy="5029200"/>
+            <a:off x="6400800" y="1554480"/>
+            <a:ext cx="4846320" cy="4572000"/>
           </a:xfrm>
           <a:prstGeom prst="rect">
             <a:avLst/>
@@ -3328,91 +5790,142 @@
           <a:noFill/>
         </p:spPr>
         <p:txBody>
-          <a:bodyPr wrap="square">
+          <a:bodyPr wrap="square" lIns="0" tIns="0" rIns="0" bIns="0">
             <a:spAutoFit/>
           </a:bodyPr>
           <a:lstStyle/>
           <a:p>
-            <a:pPr>
-              <a:defRPr sz="1800" b="1">
-                <a:solidFill>
-                  <a:srgbClr val="1E3A8A"/>
-                </a:solidFill>
-              </a:defRPr>
-            </a:pPr>
-            <a:r>
-              <a:t>Executive Problem Background:</a:t>
+            <a:r>
+              <a:rPr b="1" sz="1400">
+                <a:solidFill>
+                  <a:srgbClr val="0F172A"/>
+                </a:solidFill>
+              </a:rPr>
+              <a:t>Project 40 Engineering Solutions</a:t>
             </a:r>
           </a:p>
           <a:p>
             <a:pPr>
               <a:spcBef>
-                <a:spcPts val="1000"/>
+                <a:spcPts val="600"/>
               </a:spcBef>
-              <a:defRPr sz="1400">
-                <a:solidFill>
-                  <a:srgbClr val="334155"/>
-                </a:solidFill>
-              </a:defRPr>
             </a:pPr>
             <a:r>
-              <a:t>"Fire and smoke outbreaks pose catastrophic risks to human life, property, and environmental safety, necessitating prompt and reliable automated monitoring systems. Conventional sensor-based fire alarms often suffer from delayed response times due to physical distance from fire sources and are incapable of providing spatial context or early smoke visual cues. To overcome these limitations, this study proposes an advanced AI-based fire and smoke detection framework utilizing real-time video surve...</a:t>
+              <a:rPr b="1">
+                <a:solidFill>
+                  <a:srgbClr val="EA580C"/>
+                </a:solidFill>
+              </a:rPr>
+              <a:t>• </a:t>
+            </a:r>
+            <a:r>
+              <a:rPr b="1" sz="1100">
+                <a:solidFill>
+                  <a:srgbClr val="1E293B"/>
+                </a:solidFill>
+              </a:rPr>
+              <a:t>Dual-Stream Vision Architecture: </a:t>
+            </a:r>
+            <a:r>
+              <a:rPr sz="1100">
+                <a:solidFill>
+                  <a:srgbClr val="64748B"/>
+                </a:solidFill>
+              </a:rPr>
+              <a:t>Simultaneous extraction of spatial chromatic texture features (ConvNet) and temporal flicker frequency distributions (8-bin FFT).</a:t>
             </a:r>
           </a:p>
           <a:p>
             <a:pPr>
               <a:spcBef>
-                <a:spcPts val="1400"/>
+                <a:spcPts val="600"/>
               </a:spcBef>
-              <a:defRPr sz="1600" b="1"/>
             </a:pPr>
             <a:r>
-              <a:t>Core Industry Drivers:</a:t>
+              <a:rPr b="1">
+                <a:solidFill>
+                  <a:srgbClr val="EA580C"/>
+                </a:solidFill>
+              </a:rPr>
+              <a:t>• </a:t>
+            </a:r>
+            <a:r>
+              <a:rPr b="1" sz="1100">
+                <a:solidFill>
+                  <a:srgbClr val="1E293B"/>
+                </a:solidFill>
+              </a:rPr>
+              <a:t>Thermal Propagation Regressor: </a:t>
+            </a:r>
+            <a:r>
+              <a:rPr sz="1100">
+                <a:solidFill>
+                  <a:srgbClr val="64748B"/>
+                </a:solidFill>
+              </a:rPr>
+              <a:t>Neural network predicting flame core temperature (150-950 C), plume velocity (0.2-8.5 m/s), CO toxicity, and evacuation urgency.</a:t>
             </a:r>
           </a:p>
           <a:p>
             <a:pPr>
               <a:spcBef>
-                <a:spcPts val="400"/>
+                <a:spcPts val="600"/>
               </a:spcBef>
-              <a:defRPr sz="1300">
-                <a:solidFill>
-                  <a:srgbClr val="475569"/>
-                </a:solidFill>
-              </a:defRPr>
             </a:pPr>
             <a:r>
-              <a:t>• Manual legacy inspection/decision methods incur high operational costs, delay, and human error.</a:t>
+              <a:rPr b="1">
+                <a:solidFill>
+                  <a:srgbClr val="EA580C"/>
+                </a:solidFill>
+              </a:rPr>
+              <a:t>• </a:t>
+            </a:r>
+            <a:r>
+              <a:rPr b="1" sz="1100">
+                <a:solidFill>
+                  <a:srgbClr val="1E293B"/>
+                </a:solidFill>
+              </a:rPr>
+              <a:t>Cryptographic Audit Chain: </a:t>
+            </a:r>
+            <a:r>
+              <a:rPr sz="1100">
+                <a:solidFill>
+                  <a:srgbClr val="64748B"/>
+                </a:solidFill>
+              </a:rPr>
+              <a:t>Tamper-evident SHA-256 block ledger recording all sensor readings, inference timestamps, and automated suppression releases.</a:t>
             </a:r>
           </a:p>
           <a:p>
             <a:pPr>
               <a:spcBef>
-                <a:spcPts val="400"/>
+                <a:spcPts val="600"/>
               </a:spcBef>
-              <a:defRPr sz="1300">
-                <a:solidFill>
-                  <a:srgbClr val="475569"/>
-                </a:solidFill>
-              </a:defRPr>
             </a:pPr>
             <a:r>
-              <a:t>• Scalable automated solutions require low-latency edge and cloud neural network inference.</a:t>
-            </a:r>
-          </a:p>
-          <a:p>
-            <a:pPr>
-              <a:spcBef>
-                <a:spcPts val="400"/>
-              </a:spcBef>
-              <a:defRPr sz="1300">
-                <a:solidFill>
-                  <a:srgbClr val="475569"/>
-                </a:solidFill>
-              </a:defRPr>
-            </a:pPr>
-            <a:r>
-              <a:t>• Explainable prediction confidence metrics are essential for operational trust and regulatory compliance.</a:t>
+              <a:rPr b="1">
+                <a:solidFill>
+                  <a:srgbClr val="EA580C"/>
+                </a:solidFill>
+              </a:rPr>
+              <a:t>• </a:t>
+            </a:r>
+            <a:r>
+              <a:rPr b="1" sz="1100">
+                <a:solidFill>
+                  <a:srgbClr val="1E293B"/>
+                </a:solidFill>
+              </a:rPr>
+              <a:t>High-Throughput Edge Deployment: </a:t>
+            </a:r>
+            <a:r>
+              <a:rPr sz="1100">
+                <a:solidFill>
+                  <a:srgbClr val="64748B"/>
+                </a:solidFill>
+              </a:rPr>
+              <a:t>16.4ms sub-frame latency with native Apple MPS / NVIDIA CUDA acceleration, running seamlessly on Port 5040.</a:t>
             </a:r>
           </a:p>
         </p:txBody>
@@ -3437,23 +5950,68 @@
       <p:grpSpPr/>
       <p:sp>
         <p:nvSpPr>
-          <p:cNvPr id="2" name="Rectangle 1"/>
+          <p:cNvPr id="2" name="TextBox 1"/>
+          <p:cNvSpPr txBox="1"/>
+          <p:nvPr/>
+        </p:nvSpPr>
+        <p:spPr>
+          <a:xfrm>
+            <a:off x="731520" y="365760"/>
+            <a:ext cx="10728655" cy="822960"/>
+          </a:xfrm>
+          <a:prstGeom prst="rect">
+            <a:avLst/>
+          </a:prstGeom>
+          <a:noFill/>
+        </p:spPr>
+        <p:txBody>
+          <a:bodyPr wrap="square" lIns="0" tIns="0" rIns="0" bIns="0">
+            <a:spAutoFit/>
+          </a:bodyPr>
+          <a:lstStyle/>
+          <a:p>
+            <a:r>
+              <a:rPr b="1" sz="1000">
+                <a:solidFill>
+                  <a:srgbClr val="EA580C"/>
+                </a:solidFill>
+              </a:rPr>
+              <a:t>SYSTEM TOPOLOGY • PROJECT-040</a:t>
+            </a:r>
+          </a:p>
+          <a:p>
+            <a:r>
+              <a:rPr b="1" sz="2000">
+                <a:solidFill>
+                  <a:srgbClr val="0F172A"/>
+                </a:solidFill>
+              </a:rPr>
+              <a:t>Dual-Stream Spatio-Temporal Deep Learning Architecture</a:t>
+            </a:r>
+          </a:p>
+        </p:txBody>
+      </p:sp>
+      <p:sp>
+        <p:nvSpPr>
+          <p:cNvPr id="3" name="Rectangle 2"/>
           <p:cNvSpPr/>
           <p:nvPr/>
         </p:nvSpPr>
         <p:spPr>
           <a:xfrm>
-            <a:off x="0" y="0"/>
-            <a:ext cx="12191695" cy="1097280"/>
+            <a:off x="731520" y="1371600"/>
+            <a:ext cx="3383280" cy="4937760"/>
           </a:xfrm>
           <a:prstGeom prst="rect">
             <a:avLst/>
           </a:prstGeom>
           <a:solidFill>
-            <a:srgbClr val="0F172A"/>
+            <a:srgbClr val="FFFFFF"/>
           </a:solidFill>
-          <a:ln>
-            <a:noFill/>
+          <a:ln w="12700">
+            <a:solidFill>
+              <a:srgbClr val="E2E8F0"/>
+            </a:solidFill>
           </a:ln>
         </p:spPr>
         <p:style>
@@ -3480,14 +6038,14 @@
       </p:sp>
       <p:sp>
         <p:nvSpPr>
-          <p:cNvPr id="3" name="TextBox 2"/>
+          <p:cNvPr id="4" name="TextBox 3"/>
           <p:cNvSpPr txBox="1"/>
           <p:nvPr/>
         </p:nvSpPr>
         <p:spPr>
           <a:xfrm>
-            <a:off x="731520" y="137160"/>
-            <a:ext cx="10698480" cy="822960"/>
+            <a:off x="914400" y="1554480"/>
+            <a:ext cx="3017520" cy="4572000"/>
           </a:xfrm>
           <a:prstGeom prst="rect">
             <a:avLst/>
@@ -3495,46 +6053,170 @@
           <a:noFill/>
         </p:spPr>
         <p:txBody>
-          <a:bodyPr wrap="square">
+          <a:bodyPr wrap="square" lIns="0" tIns="0" rIns="0" bIns="0">
             <a:spAutoFit/>
           </a:bodyPr>
           <a:lstStyle/>
           <a:p>
+            <a:r>
+              <a:rPr b="1" sz="1400">
+                <a:solidFill>
+                  <a:srgbClr val="0F172A"/>
+                </a:solidFill>
+              </a:rPr>
+              <a:t>Stream 1: Spatial Chromatic Net</a:t>
+            </a:r>
+          </a:p>
+          <a:p>
             <a:pPr>
-              <a:defRPr sz="2400" b="1">
-                <a:solidFill>
-                  <a:srgbClr val="FFFFFF"/>
-                </a:solidFill>
-              </a:defRPr>
+              <a:spcBef>
+                <a:spcPts val="600"/>
+              </a:spcBef>
             </a:pPr>
             <a:r>
-              <a:t>2. Problem Statement &amp; Key Objectives</a:t>
+              <a:rPr b="1">
+                <a:solidFill>
+                  <a:srgbClr val="EA580C"/>
+                </a:solidFill>
+              </a:rPr>
+              <a:t>• </a:t>
+            </a:r>
+            <a:r>
+              <a:rPr b="1" sz="1100">
+                <a:solidFill>
+                  <a:srgbClr val="1E293B"/>
+                </a:solidFill>
+              </a:rPr>
+              <a:t>Input Representation: </a:t>
+            </a:r>
+            <a:r>
+              <a:rPr sz="1100">
+                <a:solidFill>
+                  <a:srgbClr val="64748B"/>
+                </a:solidFill>
+              </a:rPr>
+              <a:t>3-channel normalized optical video frames (64x64x3 RGB) capturing flame luminosity and smoke boundary gradient.</a:t>
             </a:r>
           </a:p>
           <a:p>
             <a:pPr>
-              <a:defRPr sz="1100">
-                <a:solidFill>
-                  <a:srgbClr val="94A3B8"/>
-                </a:solidFill>
-              </a:defRPr>
+              <a:spcBef>
+                <a:spcPts val="600"/>
+              </a:spcBef>
             </a:pPr>
             <a:r>
-              <a:t>Academic &amp; Industrial AI Project Series  |  Project 40 of 55</a:t>
-            </a:r>
-          </a:p>
-        </p:txBody>
-      </p:sp>
-      <p:sp>
-        <p:nvSpPr>
-          <p:cNvPr id="4" name="TextBox 3"/>
+              <a:rPr b="1">
+                <a:solidFill>
+                  <a:srgbClr val="EA580C"/>
+                </a:solidFill>
+              </a:rPr>
+              <a:t>• </a:t>
+            </a:r>
+            <a:r>
+              <a:rPr b="1" sz="1100">
+                <a:solidFill>
+                  <a:srgbClr val="1E293B"/>
+                </a:solidFill>
+              </a:rPr>
+              <a:t>Feature Extraction: </a:t>
+            </a:r>
+            <a:r>
+              <a:rPr sz="1100">
+                <a:solidFill>
+                  <a:srgbClr val="64748B"/>
+                </a:solidFill>
+              </a:rPr>
+              <a:t>Dual Conv2D blocks (32/64 filters), BatchNorm2d, ReLU activations, and AdaptiveAvgPool2d (4x4).</a:t>
+            </a:r>
+          </a:p>
+          <a:p>
+            <a:pPr>
+              <a:spcBef>
+                <a:spcPts val="600"/>
+              </a:spcBef>
+            </a:pPr>
+            <a:r>
+              <a:rPr b="1">
+                <a:solidFill>
+                  <a:srgbClr val="EA580C"/>
+                </a:solidFill>
+              </a:rPr>
+              <a:t>• </a:t>
+            </a:r>
+            <a:r>
+              <a:rPr b="1" sz="1100">
+                <a:solidFill>
+                  <a:srgbClr val="1E293B"/>
+                </a:solidFill>
+              </a:rPr>
+              <a:t>Dense Representation: </a:t>
+            </a:r>
+            <a:r>
+              <a:rPr sz="1100">
+                <a:solidFill>
+                  <a:srgbClr val="64748B"/>
+                </a:solidFill>
+              </a:rPr>
+              <a:t>Flattened 1024-dim tensor projected down to 128-dim dense spatial representation.</a:t>
+            </a:r>
+          </a:p>
+        </p:txBody>
+      </p:sp>
+      <p:sp>
+        <p:nvSpPr>
+          <p:cNvPr id="5" name="Rectangle 4"/>
+          <p:cNvSpPr/>
+          <p:nvPr/>
+        </p:nvSpPr>
+        <p:spPr>
+          <a:xfrm>
+            <a:off x="4389120" y="1371600"/>
+            <a:ext cx="3383280" cy="4937760"/>
+          </a:xfrm>
+          <a:prstGeom prst="rect">
+            <a:avLst/>
+          </a:prstGeom>
+          <a:solidFill>
+            <a:srgbClr val="FFFFFF"/>
+          </a:solidFill>
+          <a:ln w="12700">
+            <a:solidFill>
+              <a:srgbClr val="E2E8F0"/>
+            </a:solidFill>
+          </a:ln>
+        </p:spPr>
+        <p:style>
+          <a:lnRef idx="1">
+            <a:schemeClr val="accent1"/>
+          </a:lnRef>
+          <a:fillRef idx="3">
+            <a:schemeClr val="accent1"/>
+          </a:fillRef>
+          <a:effectRef idx="2">
+            <a:schemeClr val="accent1"/>
+          </a:effectRef>
+          <a:fontRef idx="minor">
+            <a:schemeClr val="lt1"/>
+          </a:fontRef>
+        </p:style>
+        <p:txBody>
+          <a:bodyPr rtlCol="0" anchor="ctr"/>
+          <a:lstStyle/>
+          <a:p>
+            <a:pPr algn="ctr"/>
+          </a:p>
+        </p:txBody>
+      </p:sp>
+      <p:sp>
+        <p:nvSpPr>
+          <p:cNvPr id="6" name="TextBox 5"/>
           <p:cNvSpPr txBox="1"/>
           <p:nvPr/>
         </p:nvSpPr>
         <p:spPr>
           <a:xfrm>
-            <a:off x="731520" y="1371600"/>
-            <a:ext cx="10698480" cy="5029200"/>
+            <a:off x="4572000" y="1554480"/>
+            <a:ext cx="3017520" cy="4572000"/>
           </a:xfrm>
           <a:prstGeom prst="rect">
             <a:avLst/>
@@ -3542,128 +6224,282 @@
           <a:noFill/>
         </p:spPr>
         <p:txBody>
-          <a:bodyPr wrap="square">
+          <a:bodyPr wrap="square" lIns="0" tIns="0" rIns="0" bIns="0">
             <a:spAutoFit/>
           </a:bodyPr>
           <a:lstStyle/>
           <a:p>
+            <a:r>
+              <a:rPr b="1" sz="1400">
+                <a:solidFill>
+                  <a:srgbClr val="0F172A"/>
+                </a:solidFill>
+              </a:rPr>
+              <a:t>Stream 2: Temporal Flicker FFT</a:t>
+            </a:r>
+          </a:p>
+          <a:p>
             <a:pPr>
               <a:spcBef>
-                <a:spcPts val="800"/>
+                <a:spcPts val="600"/>
               </a:spcBef>
-              <a:defRPr sz="1600" b="1">
-                <a:solidFill>
-                  <a:srgbClr val="10B981"/>
-                </a:solidFill>
-              </a:defRPr>
             </a:pPr>
             <a:r>
-              <a:t>✓ Predictive Accuracy &amp; Generalization</a:t>
+              <a:rPr b="1">
+                <a:solidFill>
+                  <a:srgbClr val="EA580C"/>
+                </a:solidFill>
+              </a:rPr>
+              <a:t>• </a:t>
+            </a:r>
+            <a:r>
+              <a:rPr b="1" sz="1100">
+                <a:solidFill>
+                  <a:srgbClr val="1E293B"/>
+                </a:solidFill>
+              </a:rPr>
+              <a:t>Flicker Dynamic Window: </a:t>
+            </a:r>
+            <a:r>
+              <a:rPr sz="1100">
+                <a:solidFill>
+                  <a:srgbClr val="64748B"/>
+                </a:solidFill>
+              </a:rPr>
+              <a:t>Tracks 8-bin frequency profile across 5-20 Hz characteristic turbulent hydrocarbon flame flicker.</a:t>
             </a:r>
           </a:p>
           <a:p>
             <a:pPr>
               <a:spcBef>
-                <a:spcPts val="200"/>
+                <a:spcPts val="600"/>
               </a:spcBef>
-              <a:defRPr sz="1300">
-                <a:solidFill>
-                  <a:srgbClr val="475569"/>
-                </a:solidFill>
-              </a:defRPr>
             </a:pPr>
             <a:r>
-              <a:t>Achieve high validation precision across diverse real-world operating distributions.</a:t>
+              <a:rPr b="1">
+                <a:solidFill>
+                  <a:srgbClr val="EA580C"/>
+                </a:solidFill>
+              </a:rPr>
+              <a:t>• </a:t>
+            </a:r>
+            <a:r>
+              <a:rPr b="1" sz="1100">
+                <a:solidFill>
+                  <a:srgbClr val="1E293B"/>
+                </a:solidFill>
+              </a:rPr>
+              <a:t>Discriminative Gating: </a:t>
+            </a:r>
+            <a:r>
+              <a:rPr sz="1100">
+                <a:solidFill>
+                  <a:srgbClr val="64748B"/>
+                </a:solidFill>
+              </a:rPr>
+              <a:t>Filters out DC lighting changes, vehicle headlights, and steady ceiling luminaires.</a:t>
             </a:r>
           </a:p>
           <a:p>
             <a:pPr>
               <a:spcBef>
-                <a:spcPts val="800"/>
+                <a:spcPts val="600"/>
               </a:spcBef>
-              <a:defRPr sz="1600" b="1">
-                <a:solidFill>
-                  <a:srgbClr val="10B981"/>
-                </a:solidFill>
-              </a:defRPr>
             </a:pPr>
             <a:r>
-              <a:t>✓ Real-Time Low Latency Inference</a:t>
+              <a:rPr b="1">
+                <a:solidFill>
+                  <a:srgbClr val="EA580C"/>
+                </a:solidFill>
+              </a:rPr>
+              <a:t>• </a:t>
+            </a:r>
+            <a:r>
+              <a:rPr b="1" sz="1100">
+                <a:solidFill>
+                  <a:srgbClr val="1E293B"/>
+                </a:solidFill>
+              </a:rPr>
+              <a:t>Dense Projection: </a:t>
+            </a:r>
+            <a:r>
+              <a:rPr sz="1100">
+                <a:solidFill>
+                  <a:srgbClr val="64748B"/>
+                </a:solidFill>
+              </a:rPr>
+              <a:t>Linear(8-&gt;32) -&gt; ReLU -&gt; Linear(32-&gt;64) -&gt; ReLU yielding 64-dim temporal motion embedding.</a:t>
+            </a:r>
+          </a:p>
+        </p:txBody>
+      </p:sp>
+      <p:sp>
+        <p:nvSpPr>
+          <p:cNvPr id="7" name="Rectangle 6"/>
+          <p:cNvSpPr/>
+          <p:nvPr/>
+        </p:nvSpPr>
+        <p:spPr>
+          <a:xfrm>
+            <a:off x="8046720" y="1371600"/>
+            <a:ext cx="3383280" cy="4937760"/>
+          </a:xfrm>
+          <a:prstGeom prst="rect">
+            <a:avLst/>
+          </a:prstGeom>
+          <a:solidFill>
+            <a:srgbClr val="FFFFFF"/>
+          </a:solidFill>
+          <a:ln w="12700">
+            <a:solidFill>
+              <a:srgbClr val="E2E8F0"/>
+            </a:solidFill>
+          </a:ln>
+        </p:spPr>
+        <p:style>
+          <a:lnRef idx="1">
+            <a:schemeClr val="accent1"/>
+          </a:lnRef>
+          <a:fillRef idx="3">
+            <a:schemeClr val="accent1"/>
+          </a:fillRef>
+          <a:effectRef idx="2">
+            <a:schemeClr val="accent1"/>
+          </a:effectRef>
+          <a:fontRef idx="minor">
+            <a:schemeClr val="lt1"/>
+          </a:fontRef>
+        </p:style>
+        <p:txBody>
+          <a:bodyPr rtlCol="0" anchor="ctr"/>
+          <a:lstStyle/>
+          <a:p>
+            <a:pPr algn="ctr"/>
+          </a:p>
+        </p:txBody>
+      </p:sp>
+      <p:sp>
+        <p:nvSpPr>
+          <p:cNvPr id="8" name="TextBox 7"/>
+          <p:cNvSpPr txBox="1"/>
+          <p:nvPr/>
+        </p:nvSpPr>
+        <p:spPr>
+          <a:xfrm>
+            <a:off x="8229600" y="1554480"/>
+            <a:ext cx="3017520" cy="4572000"/>
+          </a:xfrm>
+          <a:prstGeom prst="rect">
+            <a:avLst/>
+          </a:prstGeom>
+          <a:noFill/>
+        </p:spPr>
+        <p:txBody>
+          <a:bodyPr wrap="square" lIns="0" tIns="0" rIns="0" bIns="0">
+            <a:spAutoFit/>
+          </a:bodyPr>
+          <a:lstStyle/>
+          <a:p>
+            <a:r>
+              <a:rPr b="1" sz="1400">
+                <a:solidFill>
+                  <a:srgbClr val="0F172A"/>
+                </a:solidFill>
+              </a:rPr>
+              <a:t>Fusion &amp; Thermal Heads</a:t>
             </a:r>
           </a:p>
           <a:p>
             <a:pPr>
               <a:spcBef>
-                <a:spcPts val="200"/>
+                <a:spcPts val="600"/>
               </a:spcBef>
-              <a:defRPr sz="1300">
-                <a:solidFill>
-                  <a:srgbClr val="475569"/>
-                </a:solidFill>
-              </a:defRPr>
             </a:pPr>
             <a:r>
-              <a:t>Deliver end-to-end processing response times under 35 milliseconds per query.</a:t>
+              <a:rPr b="1">
+                <a:solidFill>
+                  <a:srgbClr val="EA580C"/>
+                </a:solidFill>
+              </a:rPr>
+              <a:t>• </a:t>
+            </a:r>
+            <a:r>
+              <a:rPr b="1" sz="1100">
+                <a:solidFill>
+                  <a:srgbClr val="1E293B"/>
+                </a:solidFill>
+              </a:rPr>
+              <a:t>Feature Concatenation: </a:t>
+            </a:r>
+            <a:r>
+              <a:rPr sz="1100">
+                <a:solidFill>
+                  <a:srgbClr val="64748B"/>
+                </a:solidFill>
+              </a:rPr>
+              <a:t>Combines 128-dim spatial + 64-dim temporal embeddings into 192-dim unified representation.</a:t>
             </a:r>
           </a:p>
           <a:p>
             <a:pPr>
               <a:spcBef>
-                <a:spcPts val="800"/>
+                <a:spcPts val="600"/>
               </a:spcBef>
-              <a:defRPr sz="1600" b="1">
-                <a:solidFill>
-                  <a:srgbClr val="10B981"/>
-                </a:solidFill>
-              </a:defRPr>
             </a:pPr>
             <a:r>
-              <a:t>✓ Robust Anomaly &amp; Boundary Handling</a:t>
+              <a:rPr b="1">
+                <a:solidFill>
+                  <a:srgbClr val="EA580C"/>
+                </a:solidFill>
+              </a:rPr>
+              <a:t>• </a:t>
+            </a:r>
+            <a:r>
+              <a:rPr b="1" sz="1100">
+                <a:solidFill>
+                  <a:srgbClr val="1E293B"/>
+                </a:solidFill>
+              </a:rPr>
+              <a:t>Hazard Classification: </a:t>
+            </a:r>
+            <a:r>
+              <a:rPr sz="1100">
+                <a:solidFill>
+                  <a:srgbClr val="64748B"/>
+                </a:solidFill>
+              </a:rPr>
+              <a:t>Dropout(0.25) -&gt; Linear(64) -&gt; 4-class output: NORMAL, SMOKE, FLAME, DUAL_HAZARD.</a:t>
             </a:r>
           </a:p>
           <a:p>
             <a:pPr>
               <a:spcBef>
-                <a:spcPts val="200"/>
+                <a:spcPts val="600"/>
               </a:spcBef>
-              <a:defRPr sz="1300">
-                <a:solidFill>
-                  <a:srgbClr val="475569"/>
-                </a:solidFill>
-              </a:defRPr>
             </a:pPr>
             <a:r>
-              <a:t>Detect out-of-distribution instances and reject anomalous inputs with deterministic alerts.</a:t>
-            </a:r>
-          </a:p>
-          <a:p>
-            <a:pPr>
-              <a:spcBef>
-                <a:spcPts val="800"/>
-              </a:spcBef>
-              <a:defRPr sz="1600" b="1">
-                <a:solidFill>
-                  <a:srgbClr val="10B981"/>
-                </a:solidFill>
-              </a:defRPr>
-            </a:pPr>
-            <a:r>
-              <a:t>✓ Production-Ready Full Stack</a:t>
-            </a:r>
-          </a:p>
-          <a:p>
-            <a:pPr>
-              <a:spcBef>
-                <a:spcPts val="200"/>
-              </a:spcBef>
-              <a:defRPr sz="1300">
-                <a:solidFill>
-                  <a:srgbClr val="475569"/>
-                </a:solidFill>
-              </a:defRPr>
-            </a:pPr>
-            <a:r>
-              <a:t>Provide modular REST APIs, audit logging, and responsive user interfaces.</a:t>
+              <a:rPr b="1">
+                <a:solidFill>
+                  <a:srgbClr val="EA580C"/>
+                </a:solidFill>
+              </a:rPr>
+              <a:t>• </a:t>
+            </a:r>
+            <a:r>
+              <a:rPr b="1" sz="1100">
+                <a:solidFill>
+                  <a:srgbClr val="1E293B"/>
+                </a:solidFill>
+              </a:rPr>
+              <a:t>Thermal Risk Trunk: </a:t>
+            </a:r>
+            <a:r>
+              <a:rPr sz="1100">
+                <a:solidFill>
+                  <a:srgbClr val="64748B"/>
+                </a:solidFill>
+              </a:rPr>
+              <a:t>10-feature physical telemetry trunk driving 4 specialized heads for temperature, plume, urgency, and CO.</a:t>
             </a:r>
           </a:p>
         </p:txBody>
@@ -3688,23 +6524,68 @@
       <p:grpSpPr/>
       <p:sp>
         <p:nvSpPr>
-          <p:cNvPr id="2" name="Rectangle 1"/>
+          <p:cNvPr id="2" name="TextBox 1"/>
+          <p:cNvSpPr txBox="1"/>
+          <p:nvPr/>
+        </p:nvSpPr>
+        <p:spPr>
+          <a:xfrm>
+            <a:off x="731520" y="365760"/>
+            <a:ext cx="10728655" cy="822960"/>
+          </a:xfrm>
+          <a:prstGeom prst="rect">
+            <a:avLst/>
+          </a:prstGeom>
+          <a:noFill/>
+        </p:spPr>
+        <p:txBody>
+          <a:bodyPr wrap="square" lIns="0" tIns="0" rIns="0" bIns="0">
+            <a:spAutoFit/>
+          </a:bodyPr>
+          <a:lstStyle/>
+          <a:p>
+            <a:r>
+              <a:rPr b="1" sz="1000">
+                <a:solidFill>
+                  <a:srgbClr val="EA580C"/>
+                </a:solidFill>
+              </a:rPr>
+              <a:t>ANALYTICAL MODELING • PROJECT-040</a:t>
+            </a:r>
+          </a:p>
+          <a:p>
+            <a:r>
+              <a:rPr b="1" sz="2000">
+                <a:solidFill>
+                  <a:srgbClr val="0F172A"/>
+                </a:solidFill>
+              </a:rPr>
+              <a:t>Mathematical Foundations &amp; Flame Physics</a:t>
+            </a:r>
+          </a:p>
+        </p:txBody>
+      </p:sp>
+      <p:sp>
+        <p:nvSpPr>
+          <p:cNvPr id="3" name="Rectangle 2"/>
           <p:cNvSpPr/>
           <p:nvPr/>
         </p:nvSpPr>
         <p:spPr>
           <a:xfrm>
-            <a:off x="0" y="0"/>
-            <a:ext cx="12191695" cy="1097280"/>
+            <a:off x="731520" y="1371600"/>
+            <a:ext cx="5120640" cy="4937760"/>
           </a:xfrm>
           <a:prstGeom prst="rect">
             <a:avLst/>
           </a:prstGeom>
           <a:solidFill>
-            <a:srgbClr val="0F172A"/>
+            <a:srgbClr val="FFFFFF"/>
           </a:solidFill>
-          <a:ln>
-            <a:noFill/>
+          <a:ln w="12700">
+            <a:solidFill>
+              <a:srgbClr val="E2E8F0"/>
+            </a:solidFill>
           </a:ln>
         </p:spPr>
         <p:style>
@@ -3731,14 +6612,14 @@
       </p:sp>
       <p:sp>
         <p:nvSpPr>
-          <p:cNvPr id="3" name="TextBox 2"/>
+          <p:cNvPr id="4" name="TextBox 3"/>
           <p:cNvSpPr txBox="1"/>
           <p:nvPr/>
         </p:nvSpPr>
         <p:spPr>
           <a:xfrm>
-            <a:off x="731520" y="137160"/>
-            <a:ext cx="10698480" cy="822960"/>
+            <a:off x="914400" y="1554480"/>
+            <a:ext cx="4754880" cy="4572000"/>
           </a:xfrm>
           <a:prstGeom prst="rect">
             <a:avLst/>
@@ -3746,46 +6627,201 @@
           <a:noFill/>
         </p:spPr>
         <p:txBody>
-          <a:bodyPr wrap="square">
+          <a:bodyPr wrap="square" lIns="0" tIns="0" rIns="0" bIns="0">
             <a:spAutoFit/>
           </a:bodyPr>
           <a:lstStyle/>
           <a:p>
+            <a:r>
+              <a:rPr b="1" sz="1400">
+                <a:solidFill>
+                  <a:srgbClr val="0F172A"/>
+                </a:solidFill>
+              </a:rPr>
+              <a:t>Flame Flicker FFT &amp; Chromatic Ratios</a:t>
+            </a:r>
+          </a:p>
+          <a:p>
             <a:pPr>
-              <a:defRPr sz="2400" b="1">
-                <a:solidFill>
-                  <a:srgbClr val="FFFFFF"/>
-                </a:solidFill>
-              </a:defRPr>
+              <a:spcBef>
+                <a:spcPts val="600"/>
+              </a:spcBef>
             </a:pPr>
             <a:r>
-              <a:t>3. System Architecture &amp; Workflow Pipeline</a:t>
+              <a:rPr b="1">
+                <a:solidFill>
+                  <a:srgbClr val="EA580C"/>
+                </a:solidFill>
+              </a:rPr>
+              <a:t>• </a:t>
+            </a:r>
+            <a:r>
+              <a:rPr b="1" sz="1100">
+                <a:solidFill>
+                  <a:srgbClr val="1E293B"/>
+                </a:solidFill>
+              </a:rPr>
+              <a:t>Hydrocarbon Flicker Law: </a:t>
+            </a:r>
+            <a:r>
+              <a:rPr sz="1100">
+                <a:solidFill>
+                  <a:srgbClr val="64748B"/>
+                </a:solidFill>
+              </a:rPr>
+              <a:t>Turbulent buoyant flames exhibit characteristic flickering given by f ~ 1.5 * (g / D)^0.5, typically between 8 Hz and 18 Hz.</a:t>
             </a:r>
           </a:p>
           <a:p>
             <a:pPr>
-              <a:defRPr sz="1100">
-                <a:solidFill>
-                  <a:srgbClr val="94A3B8"/>
-                </a:solidFill>
-              </a:defRPr>
+              <a:spcBef>
+                <a:spcPts val="600"/>
+              </a:spcBef>
             </a:pPr>
             <a:r>
-              <a:t>Academic &amp; Industrial AI Project Series  |  Project 40 of 55</a:t>
-            </a:r>
-          </a:p>
-        </p:txBody>
-      </p:sp>
-      <p:sp>
-        <p:nvSpPr>
-          <p:cNvPr id="4" name="TextBox 3"/>
+              <a:rPr b="1">
+                <a:solidFill>
+                  <a:srgbClr val="EA580C"/>
+                </a:solidFill>
+              </a:rPr>
+              <a:t>• </a:t>
+            </a:r>
+            <a:r>
+              <a:rPr b="1" sz="1100">
+                <a:solidFill>
+                  <a:srgbClr val="1E293B"/>
+                </a:solidFill>
+              </a:rPr>
+              <a:t>FFT Spectral Energy: </a:t>
+            </a:r>
+            <a:r>
+              <a:rPr sz="1100">
+                <a:solidFill>
+                  <a:srgbClr val="64748B"/>
+                </a:solidFill>
+              </a:rPr>
+              <a:t>Discrete Fourier Transform E(f) = |sum x[n] exp(-j 2 pi k n / N)|^2 evaluated over 16-frame sliding video buffers.</a:t>
+            </a:r>
+          </a:p>
+          <a:p>
+            <a:pPr>
+              <a:spcBef>
+                <a:spcPts val="600"/>
+              </a:spcBef>
+            </a:pPr>
+            <a:r>
+              <a:rPr b="1">
+                <a:solidFill>
+                  <a:srgbClr val="EA580C"/>
+                </a:solidFill>
+              </a:rPr>
+              <a:t>• </a:t>
+            </a:r>
+            <a:r>
+              <a:rPr b="1" sz="1100">
+                <a:solidFill>
+                  <a:srgbClr val="1E293B"/>
+                </a:solidFill>
+              </a:rPr>
+              <a:t>Chromatic Fire Rule: </a:t>
+            </a:r>
+            <a:r>
+              <a:rPr sz="1100">
+                <a:solidFill>
+                  <a:srgbClr val="64748B"/>
+                </a:solidFill>
+              </a:rPr>
+              <a:t>Pixel-level color thresholds: R &gt; G &gt; B, with R &gt; R_threshold and R / (R + G + B) &gt; 0.45 for luminous flame segmentation.</a:t>
+            </a:r>
+          </a:p>
+          <a:p>
+            <a:pPr>
+              <a:spcBef>
+                <a:spcPts val="600"/>
+              </a:spcBef>
+            </a:pPr>
+            <a:r>
+              <a:rPr b="1">
+                <a:solidFill>
+                  <a:srgbClr val="EA580C"/>
+                </a:solidFill>
+              </a:rPr>
+              <a:t>• </a:t>
+            </a:r>
+            <a:r>
+              <a:rPr b="1" sz="1100">
+                <a:solidFill>
+                  <a:srgbClr val="1E293B"/>
+                </a:solidFill>
+              </a:rPr>
+              <a:t>Smoke Diffusion Variance: </a:t>
+            </a:r>
+            <a:r>
+              <a:rPr sz="1100">
+                <a:solidFill>
+                  <a:srgbClr val="64748B"/>
+                </a:solidFill>
+              </a:rPr>
+              <a:t>Smoke regions exhibit low chromatic saturation and monotonic spatial dispersion: Var(I_t) - Var(I_{t-1}) &lt; 0.</a:t>
+            </a:r>
+          </a:p>
+        </p:txBody>
+      </p:sp>
+      <p:sp>
+        <p:nvSpPr>
+          <p:cNvPr id="5" name="Rectangle 4"/>
+          <p:cNvSpPr/>
+          <p:nvPr/>
+        </p:nvSpPr>
+        <p:spPr>
+          <a:xfrm>
+            <a:off x="6217920" y="1371600"/>
+            <a:ext cx="5212080" cy="4937760"/>
+          </a:xfrm>
+          <a:prstGeom prst="rect">
+            <a:avLst/>
+          </a:prstGeom>
+          <a:solidFill>
+            <a:srgbClr val="FFFFFF"/>
+          </a:solidFill>
+          <a:ln w="12700">
+            <a:solidFill>
+              <a:srgbClr val="E2E8F0"/>
+            </a:solidFill>
+          </a:ln>
+        </p:spPr>
+        <p:style>
+          <a:lnRef idx="1">
+            <a:schemeClr val="accent1"/>
+          </a:lnRef>
+          <a:fillRef idx="3">
+            <a:schemeClr val="accent1"/>
+          </a:fillRef>
+          <a:effectRef idx="2">
+            <a:schemeClr val="accent1"/>
+          </a:effectRef>
+          <a:fontRef idx="minor">
+            <a:schemeClr val="lt1"/>
+          </a:fontRef>
+        </p:style>
+        <p:txBody>
+          <a:bodyPr rtlCol="0" anchor="ctr"/>
+          <a:lstStyle/>
+          <a:p>
+            <a:pPr algn="ctr"/>
+          </a:p>
+        </p:txBody>
+      </p:sp>
+      <p:sp>
+        <p:nvSpPr>
+          <p:cNvPr id="6" name="TextBox 5"/>
           <p:cNvSpPr txBox="1"/>
           <p:nvPr/>
         </p:nvSpPr>
         <p:spPr>
           <a:xfrm>
-            <a:off x="731520" y="1371600"/>
-            <a:ext cx="10698480" cy="5029200"/>
+            <a:off x="6400800" y="1554480"/>
+            <a:ext cx="4846320" cy="4572000"/>
           </a:xfrm>
           <a:prstGeom prst="rect">
             <a:avLst/>
@@ -3793,143 +6829,142 @@
           <a:noFill/>
         </p:spPr>
         <p:txBody>
-          <a:bodyPr wrap="square">
+          <a:bodyPr wrap="square" lIns="0" tIns="0" rIns="0" bIns="0">
             <a:spAutoFit/>
           </a:bodyPr>
           <a:lstStyle/>
           <a:p>
+            <a:r>
+              <a:rPr b="1" sz="1400">
+                <a:solidFill>
+                  <a:srgbClr val="0F172A"/>
+                </a:solidFill>
+              </a:rPr>
+              <a:t>Thermal Plume &amp; Evacuation Urgency</a:t>
+            </a:r>
+          </a:p>
+          <a:p>
             <a:pPr>
               <a:spcBef>
-                <a:spcPts val="800"/>
+                <a:spcPts val="600"/>
               </a:spcBef>
-              <a:defRPr sz="1500" b="1">
-                <a:solidFill>
-                  <a:srgbClr val="2563EB"/>
-                </a:solidFill>
-              </a:defRPr>
             </a:pPr>
             <a:r>
-              <a:t>[1] Ingestion Layer</a:t>
-            </a:r>
-          </a:p>
-          <a:p>
-            <a:pPr>
-              <a:defRPr sz="1300">
-                <a:solidFill>
-                  <a:srgbClr val="475569"/>
-                </a:solidFill>
-              </a:defRPr>
-            </a:pPr>
-            <a:r>
-              <a:t>Raw telemetry, video feeds, or structured tabular features ingested via secure endpoints.</a:t>
+              <a:rPr b="1">
+                <a:solidFill>
+                  <a:srgbClr val="EA580C"/>
+                </a:solidFill>
+              </a:rPr>
+              <a:t>• </a:t>
+            </a:r>
+            <a:r>
+              <a:rPr b="1" sz="1100">
+                <a:solidFill>
+                  <a:srgbClr val="1E293B"/>
+                </a:solidFill>
+              </a:rPr>
+              <a:t>Buoyant Plume Velocity: </a:t>
+            </a:r>
+            <a:r>
+              <a:rPr sz="1100">
+                <a:solidFill>
+                  <a:srgbClr val="64748B"/>
+                </a:solidFill>
+              </a:rPr>
+              <a:t>Zukoski plume rise equation: W_p = 0.9 * (g * Q / (rho * C_p * T_amb * z))^{1/3} parameterized into neural regressor.</a:t>
             </a:r>
           </a:p>
           <a:p>
             <a:pPr>
               <a:spcBef>
-                <a:spcPts val="800"/>
+                <a:spcPts val="600"/>
               </a:spcBef>
-              <a:defRPr sz="1500" b="1">
-                <a:solidFill>
-                  <a:srgbClr val="2563EB"/>
-                </a:solidFill>
-              </a:defRPr>
             </a:pPr>
             <a:r>
-              <a:t>[2] Preprocessing &amp; Normalization</a:t>
-            </a:r>
-          </a:p>
-          <a:p>
-            <a:pPr>
-              <a:defRPr sz="1300">
-                <a:solidFill>
-                  <a:srgbClr val="475569"/>
-                </a:solidFill>
-              </a:defRPr>
-            </a:pPr>
-            <a:r>
-              <a:t>Feature scaling, missing value imputation, winsorization, and tensor reshaping.</a:t>
+              <a:rPr b="1">
+                <a:solidFill>
+                  <a:srgbClr val="EA580C"/>
+                </a:solidFill>
+              </a:rPr>
+              <a:t>• </a:t>
+            </a:r>
+            <a:r>
+              <a:rPr b="1" sz="1100">
+                <a:solidFill>
+                  <a:srgbClr val="1E293B"/>
+                </a:solidFill>
+              </a:rPr>
+              <a:t>Multi-Target Regression Loss: </a:t>
+            </a:r>
+            <a:r>
+              <a:rPr sz="1100">
+                <a:solidFill>
+                  <a:srgbClr val="64748B"/>
+                </a:solidFill>
+              </a:rPr>
+              <a:t>L_reg = alpha * MSE(T_core) + beta * MSE(W_plume) + gamma * MSE(U_urg) + delta * MSE(CO_ppm).</a:t>
             </a:r>
           </a:p>
           <a:p>
             <a:pPr>
               <a:spcBef>
-                <a:spcPts val="800"/>
+                <a:spcPts val="600"/>
               </a:spcBef>
-              <a:defRPr sz="1500" b="1">
-                <a:solidFill>
-                  <a:srgbClr val="2563EB"/>
-                </a:solidFill>
-              </a:defRPr>
             </a:pPr>
             <a:r>
-              <a:t>[3] Deep Neural Inference Engine</a:t>
-            </a:r>
-          </a:p>
-          <a:p>
-            <a:pPr>
-              <a:defRPr sz="1300">
-                <a:solidFill>
-                  <a:srgbClr val="475569"/>
-                </a:solidFill>
-              </a:defRPr>
-            </a:pPr>
-            <a:r>
-              <a:t>Optimized model evaluating representations with GPU/MPS/CPU acceleration.</a:t>
+              <a:rPr b="1">
+                <a:solidFill>
+                  <a:srgbClr val="EA580C"/>
+                </a:solidFill>
+              </a:rPr>
+              <a:t>• </a:t>
+            </a:r>
+            <a:r>
+              <a:rPr b="1" sz="1100">
+                <a:solidFill>
+                  <a:srgbClr val="1E293B"/>
+                </a:solidFill>
+              </a:rPr>
+              <a:t>Evacuation Urgency Index: </a:t>
+            </a:r>
+            <a:r>
+              <a:rPr sz="1100">
+                <a:solidFill>
+                  <a:srgbClr val="64748B"/>
+                </a:solidFill>
+              </a:rPr>
+              <a:t>U = 0.35 * (T_flame / 1000) + 0.30 * (CO / 500) + 0.20 * (W_plume / 5.0) + 0.15 * Occupancy_density.</a:t>
             </a:r>
           </a:p>
           <a:p>
             <a:pPr>
               <a:spcBef>
-                <a:spcPts val="800"/>
+                <a:spcPts val="600"/>
               </a:spcBef>
-              <a:defRPr sz="1500" b="1">
-                <a:solidFill>
-                  <a:srgbClr val="2563EB"/>
-                </a:solidFill>
-              </a:defRPr>
             </a:pPr>
             <a:r>
-              <a:t>[4] Post-Processing &amp; Decision Support</a:t>
-            </a:r>
-          </a:p>
-          <a:p>
-            <a:pPr>
-              <a:defRPr sz="1300">
-                <a:solidFill>
-                  <a:srgbClr val="475569"/>
-                </a:solidFill>
-              </a:defRPr>
-            </a:pPr>
-            <a:r>
-              <a:t>Threshold calibration, confidence scoring, classification/regression output formatting.</a:t>
-            </a:r>
-          </a:p>
-          <a:p>
-            <a:pPr>
-              <a:spcBef>
-                <a:spcPts val="800"/>
-              </a:spcBef>
-              <a:defRPr sz="1500" b="1">
-                <a:solidFill>
-                  <a:srgbClr val="2563EB"/>
-                </a:solidFill>
-              </a:defRPr>
-            </a:pPr>
-            <a:r>
-              <a:t>[5] Visualization &amp; Persistence</a:t>
-            </a:r>
-          </a:p>
-          <a:p>
-            <a:pPr>
-              <a:defRPr sz="1300">
-                <a:solidFill>
-                  <a:srgbClr val="475569"/>
-                </a:solidFill>
-              </a:defRPr>
-            </a:pPr>
-            <a:r>
-              <a:t>Interactive UI dashboard rendering metrics and SQLite/PostgreSQL audit logging.</a:t>
+              <a:rPr b="1">
+                <a:solidFill>
+                  <a:srgbClr val="EA580C"/>
+                </a:solidFill>
+              </a:rPr>
+              <a:t>• </a:t>
+            </a:r>
+            <a:r>
+              <a:rPr b="1" sz="1100">
+                <a:solidFill>
+                  <a:srgbClr val="1E293B"/>
+                </a:solidFill>
+              </a:rPr>
+              <a:t>Tamper-Proof Verification: </a:t>
+            </a:r>
+            <a:r>
+              <a:rPr sz="1100">
+                <a:solidFill>
+                  <a:srgbClr val="64748B"/>
+                </a:solidFill>
+              </a:rPr>
+              <a:t>Block hash continuity: H_i = SHA-256(Action || Details || Timestamp || H_{i-1}).</a:t>
             </a:r>
           </a:p>
         </p:txBody>
@@ -3954,23 +6989,92 @@
       <p:grpSpPr/>
       <p:sp>
         <p:nvSpPr>
-          <p:cNvPr id="2" name="Rectangle 1"/>
+          <p:cNvPr id="2" name="TextBox 1"/>
+          <p:cNvSpPr txBox="1"/>
+          <p:nvPr/>
+        </p:nvSpPr>
+        <p:spPr>
+          <a:xfrm>
+            <a:off x="731520" y="365760"/>
+            <a:ext cx="10728655" cy="822960"/>
+          </a:xfrm>
+          <a:prstGeom prst="rect">
+            <a:avLst/>
+          </a:prstGeom>
+          <a:noFill/>
+        </p:spPr>
+        <p:txBody>
+          <a:bodyPr wrap="square" lIns="0" tIns="0" rIns="0" bIns="0">
+            <a:spAutoFit/>
+          </a:bodyPr>
+          <a:lstStyle/>
+          <a:p>
+            <a:r>
+              <a:rPr b="1" sz="1000">
+                <a:solidFill>
+                  <a:srgbClr val="EA580C"/>
+                </a:solidFill>
+              </a:rPr>
+              <a:t>LIVE PLATFORM UI • PROJECT-040</a:t>
+            </a:r>
+          </a:p>
+          <a:p>
+            <a:r>
+              <a:rPr b="1" sz="2000">
+                <a:solidFill>
+                  <a:srgbClr val="0F172A"/>
+                </a:solidFill>
+              </a:rPr>
+              <a:t>Real-Time Surveillance Command Dashboard</a:t>
+            </a:r>
+          </a:p>
+        </p:txBody>
+      </p:sp>
+      <p:pic>
+        <p:nvPicPr>
+          <p:cNvPr id="3" name="Picture 2" descr="01_command_dashboard.png"/>
+          <p:cNvPicPr>
+            <a:picLocks noChangeAspect="1"/>
+          </p:cNvPicPr>
+          <p:nvPr/>
+        </p:nvPicPr>
+        <p:blipFill>
+          <a:blip r:embed="rId2"/>
+          <a:stretch>
+            <a:fillRect/>
+          </a:stretch>
+        </p:blipFill>
+        <p:spPr>
+          <a:xfrm>
+            <a:off x="731520" y="1371600"/>
+            <a:ext cx="6583680" cy="4114800"/>
+          </a:xfrm>
+          <a:prstGeom prst="rect">
+            <a:avLst/>
+          </a:prstGeom>
+        </p:spPr>
+      </p:pic>
+      <p:sp>
+        <p:nvSpPr>
+          <p:cNvPr id="4" name="Rectangle 3"/>
           <p:cNvSpPr/>
           <p:nvPr/>
         </p:nvSpPr>
         <p:spPr>
           <a:xfrm>
-            <a:off x="0" y="0"/>
-            <a:ext cx="12191695" cy="1097280"/>
+            <a:off x="7589520" y="1371600"/>
+            <a:ext cx="3840480" cy="4937760"/>
           </a:xfrm>
           <a:prstGeom prst="rect">
             <a:avLst/>
           </a:prstGeom>
           <a:solidFill>
-            <a:srgbClr val="0F172A"/>
+            <a:srgbClr val="FFFFFF"/>
           </a:solidFill>
-          <a:ln>
-            <a:noFill/>
+          <a:ln w="12700">
+            <a:solidFill>
+              <a:srgbClr val="E2E8F0"/>
+            </a:solidFill>
           </a:ln>
         </p:spPr>
         <p:style>
@@ -3997,14 +7101,14 @@
       </p:sp>
       <p:sp>
         <p:nvSpPr>
-          <p:cNvPr id="3" name="TextBox 2"/>
+          <p:cNvPr id="5" name="TextBox 4"/>
           <p:cNvSpPr txBox="1"/>
           <p:nvPr/>
         </p:nvSpPr>
         <p:spPr>
           <a:xfrm>
-            <a:off x="731520" y="137160"/>
-            <a:ext cx="10698480" cy="822960"/>
+            <a:off x="7772400" y="1554480"/>
+            <a:ext cx="3474720" cy="4572000"/>
           </a:xfrm>
           <a:prstGeom prst="rect">
             <a:avLst/>
@@ -4012,163 +7116,142 @@
           <a:noFill/>
         </p:spPr>
         <p:txBody>
-          <a:bodyPr wrap="square">
+          <a:bodyPr wrap="square" lIns="0" tIns="0" rIns="0" bIns="0">
             <a:spAutoFit/>
           </a:bodyPr>
           <a:lstStyle/>
           <a:p>
-            <a:pPr>
-              <a:defRPr sz="2400" b="1">
-                <a:solidFill>
-                  <a:srgbClr val="FFFFFF"/>
-                </a:solidFill>
-              </a:defRPr>
-            </a:pPr>
-            <a:r>
-              <a:t>4. Deep Learning &amp; ML Methodology</a:t>
-            </a:r>
-          </a:p>
-          <a:p>
-            <a:pPr>
-              <a:defRPr sz="1100">
-                <a:solidFill>
-                  <a:srgbClr val="94A3B8"/>
-                </a:solidFill>
-              </a:defRPr>
-            </a:pPr>
-            <a:r>
-              <a:t>Academic &amp; Industrial AI Project Series  |  Project 40 of 55</a:t>
-            </a:r>
-          </a:p>
-        </p:txBody>
-      </p:sp>
-      <p:sp>
-        <p:nvSpPr>
-          <p:cNvPr id="4" name="TextBox 3"/>
-          <p:cNvSpPr txBox="1"/>
-          <p:nvPr/>
-        </p:nvSpPr>
-        <p:spPr>
-          <a:xfrm>
-            <a:off x="731520" y="1371600"/>
-            <a:ext cx="10698480" cy="5029200"/>
-          </a:xfrm>
-          <a:prstGeom prst="rect">
-            <a:avLst/>
-          </a:prstGeom>
-          <a:noFill/>
-        </p:spPr>
-        <p:txBody>
-          <a:bodyPr wrap="square">
-            <a:spAutoFit/>
-          </a:bodyPr>
-          <a:lstStyle/>
+            <a:r>
+              <a:rPr b="1" sz="1400">
+                <a:solidFill>
+                  <a:srgbClr val="0F172A"/>
+                </a:solidFill>
+              </a:rPr>
+              <a:t>Mission-Control Capabilities</a:t>
+            </a:r>
+          </a:p>
           <a:p>
             <a:pPr>
               <a:spcBef>
-                <a:spcPts val="800"/>
+                <a:spcPts val="600"/>
               </a:spcBef>
-              <a:defRPr sz="1500" b="1">
-                <a:solidFill>
-                  <a:srgbClr val="0F172A"/>
-                </a:solidFill>
-              </a:defRPr>
             </a:pPr>
             <a:r>
-              <a:t>• Feature Engineering &amp; Dimensionality Alignment</a:t>
-            </a:r>
-          </a:p>
-          <a:p>
-            <a:pPr>
-              <a:defRPr sz="1300">
-                <a:solidFill>
-                  <a:srgbClr val="475569"/>
-                </a:solidFill>
-              </a:defRPr>
-            </a:pPr>
-            <a:r>
-              <a:t>Domain-specific feature extraction, temporal windowing, and embedding vectors.</a:t>
+              <a:rPr b="1">
+                <a:solidFill>
+                  <a:srgbClr val="EA580C"/>
+                </a:solidFill>
+              </a:rPr>
+              <a:t>• </a:t>
+            </a:r>
+            <a:r>
+              <a:rPr b="1" sz="1100">
+                <a:solidFill>
+                  <a:srgbClr val="1E293B"/>
+                </a:solidFill>
+              </a:rPr>
+              <a:t>Dedicated Port 5040: </a:t>
+            </a:r>
+            <a:r>
+              <a:rPr sz="1100">
+                <a:solidFill>
+                  <a:srgbClr val="64748B"/>
+                </a:solidFill>
+              </a:rPr>
+              <a:t>Full-stack edge microservice operating with FastAPI backend and high-performance reactive UI.</a:t>
             </a:r>
           </a:p>
           <a:p>
             <a:pPr>
               <a:spcBef>
-                <a:spcPts val="800"/>
+                <a:spcPts val="600"/>
               </a:spcBef>
-              <a:defRPr sz="1500" b="1">
-                <a:solidFill>
-                  <a:srgbClr val="0F172A"/>
-                </a:solidFill>
-              </a:defRPr>
             </a:pPr>
             <a:r>
-              <a:t>• Model Family &amp; Optimization</a:t>
-            </a:r>
-          </a:p>
-          <a:p>
-            <a:pPr>
-              <a:defRPr sz="1300">
-                <a:solidFill>
-                  <a:srgbClr val="475569"/>
-                </a:solidFill>
-              </a:defRPr>
-            </a:pPr>
-            <a:r>
-              <a:t>Ensemble gradient boosting or deep neural networks trained with AdamW and adaptive LR scheduling.</a:t>
+              <a:rPr b="1">
+                <a:solidFill>
+                  <a:srgbClr val="EA580C"/>
+                </a:solidFill>
+              </a:rPr>
+              <a:t>• </a:t>
+            </a:r>
+            <a:r>
+              <a:rPr b="1" sz="1100">
+                <a:solidFill>
+                  <a:srgbClr val="1E293B"/>
+                </a:solidFill>
+              </a:rPr>
+              <a:t>Live Telemetry Strip: </a:t>
+            </a:r>
+            <a:r>
+              <a:rPr sz="1100">
+                <a:solidFill>
+                  <a:srgbClr val="64748B"/>
+                </a:solidFill>
+              </a:rPr>
+              <a:t>Instant readout of total scans (6,000+), active critical alarms, protected hazard zones, and audit chain status.</a:t>
             </a:r>
           </a:p>
           <a:p>
             <a:pPr>
               <a:spcBef>
-                <a:spcPts val="800"/>
+                <a:spcPts val="600"/>
               </a:spcBef>
-              <a:defRPr sz="1500" b="1">
-                <a:solidFill>
-                  <a:srgbClr val="0F172A"/>
-                </a:solidFill>
-              </a:defRPr>
             </a:pPr>
             <a:r>
-              <a:t>• Overfitting Mitigation</a:t>
-            </a:r>
-          </a:p>
-          <a:p>
-            <a:pPr>
-              <a:defRPr sz="1300">
-                <a:solidFill>
-                  <a:srgbClr val="475569"/>
-                </a:solidFill>
-              </a:defRPr>
-            </a:pPr>
-            <a:r>
-              <a:t>Stratified k-fold cross-validation, dropout layers, early stopping, and data augmentation.</a:t>
+              <a:rPr b="1">
+                <a:solidFill>
+                  <a:srgbClr val="EA580C"/>
+                </a:solidFill>
+              </a:rPr>
+              <a:t>• </a:t>
+            </a:r>
+            <a:r>
+              <a:rPr b="1" sz="1100">
+                <a:solidFill>
+                  <a:srgbClr val="1E293B"/>
+                </a:solidFill>
+              </a:rPr>
+              <a:t>Multi-Zone Dispatcher: </a:t>
+            </a:r>
+            <a:r>
+              <a:rPr sz="1100">
+                <a:solidFill>
+                  <a:srgbClr val="64748B"/>
+                </a:solidFill>
+              </a:rPr>
+              <a:t>One-click switching across 5 mission-critical industrial facilities with individual camera feeds.</a:t>
             </a:r>
           </a:p>
           <a:p>
             <a:pPr>
               <a:spcBef>
-                <a:spcPts val="800"/>
+                <a:spcPts val="600"/>
               </a:spcBef>
-              <a:defRPr sz="1500" b="1">
-                <a:solidFill>
-                  <a:srgbClr val="0F172A"/>
-                </a:solidFill>
-              </a:defRPr>
             </a:pPr>
             <a:r>
-              <a:t>• Explainability &amp; Auditability</a:t>
-            </a:r>
-          </a:p>
-          <a:p>
-            <a:pPr>
-              <a:defRPr sz="1300">
-                <a:solidFill>
-                  <a:srgbClr val="475569"/>
-                </a:solidFill>
-              </a:defRPr>
-            </a:pPr>
-            <a:r>
-              <a:t>Confidence scores and feature importance attributions for high-stakes decisions.</a:t>
+              <a:rPr b="1">
+                <a:solidFill>
+                  <a:srgbClr val="EA580C"/>
+                </a:solidFill>
+              </a:rPr>
+              <a:t>• </a:t>
+            </a:r>
+            <a:r>
+              <a:rPr b="1" sz="1100">
+                <a:solidFill>
+                  <a:srgbClr val="1E293B"/>
+                </a:solidFill>
+              </a:rPr>
+              <a:t>Optical &amp; Thermal Gating: </a:t>
+            </a:r>
+            <a:r>
+              <a:rPr sz="1100">
+                <a:solidFill>
+                  <a:srgbClr val="64748B"/>
+                </a:solidFill>
+              </a:rPr>
+              <a:t>Dual-stream visual status badge confirming 1080p 60 FPS CCTV connection and FFT spectrum readiness.</a:t>
             </a:r>
           </a:p>
         </p:txBody>
@@ -4193,23 +7276,92 @@
       <p:grpSpPr/>
       <p:sp>
         <p:nvSpPr>
-          <p:cNvPr id="2" name="Rectangle 1"/>
+          <p:cNvPr id="2" name="TextBox 1"/>
+          <p:cNvSpPr txBox="1"/>
+          <p:nvPr/>
+        </p:nvSpPr>
+        <p:spPr>
+          <a:xfrm>
+            <a:off x="731520" y="365760"/>
+            <a:ext cx="10728655" cy="822960"/>
+          </a:xfrm>
+          <a:prstGeom prst="rect">
+            <a:avLst/>
+          </a:prstGeom>
+          <a:noFill/>
+        </p:spPr>
+        <p:txBody>
+          <a:bodyPr wrap="square" lIns="0" tIns="0" rIns="0" bIns="0">
+            <a:spAutoFit/>
+          </a:bodyPr>
+          <a:lstStyle/>
+          <a:p>
+            <a:r>
+              <a:rPr b="1" sz="1000">
+                <a:solidFill>
+                  <a:srgbClr val="EA580C"/>
+                </a:solidFill>
+              </a:rPr>
+              <a:t>VISUAL TELEMETRY • PROJECT-040</a:t>
+            </a:r>
+          </a:p>
+          <a:p>
+            <a:r>
+              <a:rPr b="1" sz="2000">
+                <a:solidFill>
+                  <a:srgbClr val="0F172A"/>
+                </a:solidFill>
+              </a:rPr>
+              <a:t>High-Fidelity CCTV Surveillance &amp; Particle Simulation</a:t>
+            </a:r>
+          </a:p>
+        </p:txBody>
+      </p:sp>
+      <p:pic>
+        <p:nvPicPr>
+          <p:cNvPr id="3" name="Picture 2" descr="02_cctv_flame_smoke_particle_feed.png"/>
+          <p:cNvPicPr>
+            <a:picLocks noChangeAspect="1"/>
+          </p:cNvPicPr>
+          <p:nvPr/>
+        </p:nvPicPr>
+        <p:blipFill>
+          <a:blip r:embed="rId2"/>
+          <a:stretch>
+            <a:fillRect/>
+          </a:stretch>
+        </p:blipFill>
+        <p:spPr>
+          <a:xfrm>
+            <a:off x="731520" y="1371600"/>
+            <a:ext cx="6583680" cy="4114800"/>
+          </a:xfrm>
+          <a:prstGeom prst="rect">
+            <a:avLst/>
+          </a:prstGeom>
+        </p:spPr>
+      </p:pic>
+      <p:sp>
+        <p:nvSpPr>
+          <p:cNvPr id="4" name="Rectangle 3"/>
           <p:cNvSpPr/>
           <p:nvPr/>
         </p:nvSpPr>
         <p:spPr>
           <a:xfrm>
-            <a:off x="0" y="0"/>
-            <a:ext cx="12191695" cy="1097280"/>
+            <a:off x="7589520" y="1371600"/>
+            <a:ext cx="3840480" cy="4937760"/>
           </a:xfrm>
           <a:prstGeom prst="rect">
             <a:avLst/>
           </a:prstGeom>
           <a:solidFill>
-            <a:srgbClr val="0F172A"/>
+            <a:srgbClr val="FFFFFF"/>
           </a:solidFill>
-          <a:ln>
-            <a:noFill/>
+          <a:ln w="12700">
+            <a:solidFill>
+              <a:srgbClr val="E2E8F0"/>
+            </a:solidFill>
           </a:ln>
         </p:spPr>
         <p:style>
@@ -4236,14 +7388,14 @@
       </p:sp>
       <p:sp>
         <p:nvSpPr>
-          <p:cNvPr id="3" name="TextBox 2"/>
+          <p:cNvPr id="5" name="TextBox 4"/>
           <p:cNvSpPr txBox="1"/>
           <p:nvPr/>
         </p:nvSpPr>
         <p:spPr>
           <a:xfrm>
-            <a:off x="731520" y="137160"/>
-            <a:ext cx="10698480" cy="822960"/>
+            <a:off x="7772400" y="1554480"/>
+            <a:ext cx="3474720" cy="4572000"/>
           </a:xfrm>
           <a:prstGeom prst="rect">
             <a:avLst/>
@@ -4251,115 +7403,142 @@
           <a:noFill/>
         </p:spPr>
         <p:txBody>
-          <a:bodyPr wrap="square">
+          <a:bodyPr wrap="square" lIns="0" tIns="0" rIns="0" bIns="0">
             <a:spAutoFit/>
           </a:bodyPr>
           <a:lstStyle/>
           <a:p>
-            <a:pPr>
-              <a:defRPr sz="2400" b="1">
-                <a:solidFill>
-                  <a:srgbClr val="FFFFFF"/>
-                </a:solidFill>
-              </a:defRPr>
-            </a:pPr>
-            <a:r>
-              <a:t>5. Experimental Results &amp; Performance Benchmarks</a:t>
-            </a:r>
-          </a:p>
-          <a:p>
-            <a:pPr>
-              <a:defRPr sz="1100">
-                <a:solidFill>
-                  <a:srgbClr val="94A3B8"/>
-                </a:solidFill>
-              </a:defRPr>
-            </a:pPr>
-            <a:r>
-              <a:t>Academic &amp; Industrial AI Project Series  |  Project 40 of 55</a:t>
-            </a:r>
-          </a:p>
-        </p:txBody>
-      </p:sp>
-      <p:sp>
-        <p:nvSpPr>
-          <p:cNvPr id="4" name="TextBox 3"/>
-          <p:cNvSpPr txBox="1"/>
-          <p:nvPr/>
-        </p:nvSpPr>
-        <p:spPr>
-          <a:xfrm>
-            <a:off x="731520" y="1371600"/>
-            <a:ext cx="10698480" cy="5029200"/>
-          </a:xfrm>
-          <a:prstGeom prst="rect">
-            <a:avLst/>
-          </a:prstGeom>
-          <a:noFill/>
-        </p:spPr>
-        <p:txBody>
-          <a:bodyPr wrap="square">
-            <a:spAutoFit/>
-          </a:bodyPr>
-          <a:lstStyle/>
+            <a:r>
+              <a:rPr b="1" sz="1400">
+                <a:solidFill>
+                  <a:srgbClr val="0F172A"/>
+                </a:solidFill>
+              </a:rPr>
+              <a:t>CCTV Simulation Dynamics</a:t>
+            </a:r>
+          </a:p>
           <a:p>
             <a:pPr>
               <a:spcBef>
-                <a:spcPts val="1200"/>
+                <a:spcPts val="600"/>
               </a:spcBef>
-              <a:defRPr sz="1500" b="1">
-                <a:solidFill>
-                  <a:srgbClr val="10B981"/>
-                </a:solidFill>
-              </a:defRPr>
             </a:pPr>
             <a:r>
-              <a:t>★ Validation Accuracy / Score: Achieved 94.8% on independent validation test holdout partitions.</a:t>
+              <a:rPr b="1">
+                <a:solidFill>
+                  <a:srgbClr val="EA580C"/>
+                </a:solidFill>
+              </a:rPr>
+              <a:t>• </a:t>
+            </a:r>
+            <a:r>
+              <a:rPr b="1" sz="1100">
+                <a:solidFill>
+                  <a:srgbClr val="1E293B"/>
+                </a:solidFill>
+              </a:rPr>
+              <a:t>Synthetic Flame Emitters: </a:t>
+            </a:r>
+            <a:r>
+              <a:rPr sz="1100">
+                <a:solidFill>
+                  <a:srgbClr val="64748B"/>
+                </a:solidFill>
+              </a:rPr>
+              <a:t>Real-time canvas rendering of buoyant, turbulent flame kernels with high-luminance cores.</a:t>
             </a:r>
           </a:p>
           <a:p>
             <a:pPr>
               <a:spcBef>
-                <a:spcPts val="1200"/>
+                <a:spcPts val="600"/>
               </a:spcBef>
-              <a:defRPr sz="1500" b="1">
-                <a:solidFill>
-                  <a:srgbClr val="10B981"/>
-                </a:solidFill>
-              </a:defRPr>
             </a:pPr>
             <a:r>
-              <a:t>★ F1-Score / Macro Precision: Balanced metric of 0.932 across positive and negative classification targets.</a:t>
+              <a:rPr b="1">
+                <a:solidFill>
+                  <a:srgbClr val="EA580C"/>
+                </a:solidFill>
+              </a:rPr>
+              <a:t>• </a:t>
+            </a:r>
+            <a:r>
+              <a:rPr b="1" sz="1100">
+                <a:solidFill>
+                  <a:srgbClr val="1E293B"/>
+                </a:solidFill>
+              </a:rPr>
+              <a:t>Smoke Plume Dispersion: </a:t>
+            </a:r>
+            <a:r>
+              <a:rPr sz="1100">
+                <a:solidFill>
+                  <a:srgbClr val="64748B"/>
+                </a:solidFill>
+              </a:rPr>
+              <a:t>Stochastic particulate expansion modeling atmospheric diffusion, thermal updraft, and opacity.</a:t>
             </a:r>
           </a:p>
           <a:p>
             <a:pPr>
               <a:spcBef>
-                <a:spcPts val="1200"/>
+                <a:spcPts val="600"/>
               </a:spcBef>
-              <a:defRPr sz="1500" b="1">
-                <a:solidFill>
-                  <a:srgbClr val="10B981"/>
-                </a:solidFill>
-              </a:defRPr>
             </a:pPr>
             <a:r>
-              <a:t>★ Inference Latency Profile: Median latency of 18.4 ms per inference query on edge CPU hardware.</a:t>
+              <a:rPr b="1">
+                <a:solidFill>
+                  <a:srgbClr val="EA580C"/>
+                </a:solidFill>
+              </a:rPr>
+              <a:t>• </a:t>
+            </a:r>
+            <a:r>
+              <a:rPr b="1" sz="1100">
+                <a:solidFill>
+                  <a:srgbClr val="1E293B"/>
+                </a:solidFill>
+              </a:rPr>
+              <a:t>Dynamic Bounding Envelopes: </a:t>
+            </a:r>
+            <a:r>
+              <a:rPr sz="1100">
+                <a:solidFill>
+                  <a:srgbClr val="64748B"/>
+                </a:solidFill>
+              </a:rPr>
+              <a:t>Instantaneous spatial bounding boxes with hazard classification and confidence percentage overlay.</a:t>
             </a:r>
           </a:p>
           <a:p>
             <a:pPr>
               <a:spcBef>
-                <a:spcPts val="1200"/>
+                <a:spcPts val="600"/>
               </a:spcBef>
-              <a:defRPr sz="1500" b="1">
-                <a:solidFill>
-                  <a:srgbClr val="10B981"/>
-                </a:solidFill>
-              </a:defRPr>
             </a:pPr>
             <a:r>
-              <a:t>★ False Positive Rate (FPR): Maintained below 2.8%, satisfying stringent operational false alarm constraints.</a:t>
+              <a:rPr b="1">
+                <a:solidFill>
+                  <a:srgbClr val="EA580C"/>
+                </a:solidFill>
+              </a:rPr>
+              <a:t>• </a:t>
+            </a:r>
+            <a:r>
+              <a:rPr b="1" sz="1100">
+                <a:solidFill>
+                  <a:srgbClr val="1E293B"/>
+                </a:solidFill>
+              </a:rPr>
+              <a:t>Thermal Colormap Fusion: </a:t>
+            </a:r>
+            <a:r>
+              <a:rPr sz="1100">
+                <a:solidFill>
+                  <a:srgbClr val="64748B"/>
+                </a:solidFill>
+              </a:rPr>
+              <a:t>Simulated infrared heat gradient highlighting flame core temperatures exceeding 700 C.</a:t>
             </a:r>
           </a:p>
         </p:txBody>
@@ -4384,23 +7563,92 @@
       <p:grpSpPr/>
       <p:sp>
         <p:nvSpPr>
-          <p:cNvPr id="2" name="Rectangle 1"/>
+          <p:cNvPr id="2" name="TextBox 1"/>
+          <p:cNvSpPr txBox="1"/>
+          <p:nvPr/>
+        </p:nvSpPr>
+        <p:spPr>
+          <a:xfrm>
+            <a:off x="731520" y="365760"/>
+            <a:ext cx="10728655" cy="822960"/>
+          </a:xfrm>
+          <a:prstGeom prst="rect">
+            <a:avLst/>
+          </a:prstGeom>
+          <a:noFill/>
+        </p:spPr>
+        <p:txBody>
+          <a:bodyPr wrap="square" lIns="0" tIns="0" rIns="0" bIns="0">
+            <a:spAutoFit/>
+          </a:bodyPr>
+          <a:lstStyle/>
+          <a:p>
+            <a:r>
+              <a:rPr b="1" sz="1000">
+                <a:solidFill>
+                  <a:srgbClr val="EA580C"/>
+                </a:solidFill>
+              </a:rPr>
+              <a:t>TEMPORAL SIGNAL PROCESSING • PROJECT-040</a:t>
+            </a:r>
+          </a:p>
+          <a:p>
+            <a:r>
+              <a:rPr b="1" sz="2000">
+                <a:solidFill>
+                  <a:srgbClr val="0F172A"/>
+                </a:solidFill>
+              </a:rPr>
+              <a:t>5-20 Hz FFT Flame Flicker Frequency Spectrum</a:t>
+            </a:r>
+          </a:p>
+        </p:txBody>
+      </p:sp>
+      <p:pic>
+        <p:nvPicPr>
+          <p:cNvPr id="3" name="Picture 2" descr="03_fft_flicker_spectrum_analyzer.png"/>
+          <p:cNvPicPr>
+            <a:picLocks noChangeAspect="1"/>
+          </p:cNvPicPr>
+          <p:nvPr/>
+        </p:nvPicPr>
+        <p:blipFill>
+          <a:blip r:embed="rId2"/>
+          <a:stretch>
+            <a:fillRect/>
+          </a:stretch>
+        </p:blipFill>
+        <p:spPr>
+          <a:xfrm>
+            <a:off x="731520" y="1371600"/>
+            <a:ext cx="6583680" cy="4114800"/>
+          </a:xfrm>
+          <a:prstGeom prst="rect">
+            <a:avLst/>
+          </a:prstGeom>
+        </p:spPr>
+      </p:pic>
+      <p:sp>
+        <p:nvSpPr>
+          <p:cNvPr id="4" name="Rectangle 3"/>
           <p:cNvSpPr/>
           <p:nvPr/>
         </p:nvSpPr>
         <p:spPr>
           <a:xfrm>
-            <a:off x="0" y="0"/>
-            <a:ext cx="12191695" cy="1097280"/>
+            <a:off x="7589520" y="1371600"/>
+            <a:ext cx="3840480" cy="4937760"/>
           </a:xfrm>
           <a:prstGeom prst="rect">
             <a:avLst/>
           </a:prstGeom>
           <a:solidFill>
-            <a:srgbClr val="0F172A"/>
+            <a:srgbClr val="FFFFFF"/>
           </a:solidFill>
-          <a:ln>
-            <a:noFill/>
+          <a:ln w="12700">
+            <a:solidFill>
+              <a:srgbClr val="E2E8F0"/>
+            </a:solidFill>
           </a:ln>
         </p:spPr>
         <p:style>
@@ -4427,14 +7675,14 @@
       </p:sp>
       <p:sp>
         <p:nvSpPr>
-          <p:cNvPr id="3" name="TextBox 2"/>
+          <p:cNvPr id="5" name="TextBox 4"/>
           <p:cNvSpPr txBox="1"/>
           <p:nvPr/>
         </p:nvSpPr>
         <p:spPr>
           <a:xfrm>
-            <a:off x="731520" y="137160"/>
-            <a:ext cx="10698480" cy="822960"/>
+            <a:off x="7772400" y="1554480"/>
+            <a:ext cx="3474720" cy="4572000"/>
           </a:xfrm>
           <a:prstGeom prst="rect">
             <a:avLst/>
@@ -4442,163 +7690,142 @@
           <a:noFill/>
         </p:spPr>
         <p:txBody>
-          <a:bodyPr wrap="square">
+          <a:bodyPr wrap="square" lIns="0" tIns="0" rIns="0" bIns="0">
             <a:spAutoFit/>
           </a:bodyPr>
           <a:lstStyle/>
           <a:p>
-            <a:pPr>
-              <a:defRPr sz="2400" b="1">
-                <a:solidFill>
-                  <a:srgbClr val="FFFFFF"/>
-                </a:solidFill>
-              </a:defRPr>
-            </a:pPr>
-            <a:r>
-              <a:t>6. Technology Stack &amp; Production Deployment</a:t>
-            </a:r>
-          </a:p>
-          <a:p>
-            <a:pPr>
-              <a:defRPr sz="1100">
-                <a:solidFill>
-                  <a:srgbClr val="94A3B8"/>
-                </a:solidFill>
-              </a:defRPr>
-            </a:pPr>
-            <a:r>
-              <a:t>Academic &amp; Industrial AI Project Series  |  Project 40 of 55</a:t>
-            </a:r>
-          </a:p>
-        </p:txBody>
-      </p:sp>
-      <p:sp>
-        <p:nvSpPr>
-          <p:cNvPr id="4" name="TextBox 3"/>
-          <p:cNvSpPr txBox="1"/>
-          <p:nvPr/>
-        </p:nvSpPr>
-        <p:spPr>
-          <a:xfrm>
-            <a:off x="731520" y="1371600"/>
-            <a:ext cx="10698480" cy="5029200"/>
-          </a:xfrm>
-          <a:prstGeom prst="rect">
-            <a:avLst/>
-          </a:prstGeom>
-          <a:noFill/>
-        </p:spPr>
-        <p:txBody>
-          <a:bodyPr wrap="square">
-            <a:spAutoFit/>
-          </a:bodyPr>
-          <a:lstStyle/>
+            <a:r>
+              <a:rPr b="1" sz="1400">
+                <a:solidFill>
+                  <a:srgbClr val="0F172A"/>
+                </a:solidFill>
+              </a:rPr>
+              <a:t>Spectral Feature Engineering</a:t>
+            </a:r>
+          </a:p>
           <a:p>
             <a:pPr>
               <a:spcBef>
-                <a:spcPts val="800"/>
+                <a:spcPts val="600"/>
               </a:spcBef>
-              <a:defRPr sz="1500" b="1">
-                <a:solidFill>
-                  <a:srgbClr val="1E3A8A"/>
-                </a:solidFill>
-              </a:defRPr>
             </a:pPr>
             <a:r>
-              <a:t>⚙ Core Machine Learning Framework</a:t>
-            </a:r>
-          </a:p>
-          <a:p>
-            <a:pPr>
-              <a:defRPr sz="1300">
-                <a:solidFill>
-                  <a:srgbClr val="475569"/>
-                </a:solidFill>
-              </a:defRPr>
-            </a:pPr>
-            <a:r>
-              <a:t>PyTorch 2.0+ / Scikit-learn / HuggingFace Transformers / OpenCV</a:t>
+              <a:rPr b="1">
+                <a:solidFill>
+                  <a:srgbClr val="EA580C"/>
+                </a:solidFill>
+              </a:rPr>
+              <a:t>• </a:t>
+            </a:r>
+            <a:r>
+              <a:rPr b="1" sz="1100">
+                <a:solidFill>
+                  <a:srgbClr val="1E293B"/>
+                </a:solidFill>
+              </a:rPr>
+              <a:t>Temporal Oscillation Tracking: </a:t>
+            </a:r>
+            <a:r>
+              <a:rPr sz="1100">
+                <a:solidFill>
+                  <a:srgbClr val="64748B"/>
+                </a:solidFill>
+              </a:rPr>
+              <a:t>Fast Fourier Transform computed across sliding temporal windows to detect vortex shedding.</a:t>
             </a:r>
           </a:p>
           <a:p>
             <a:pPr>
               <a:spcBef>
-                <a:spcPts val="800"/>
+                <a:spcPts val="600"/>
               </a:spcBef>
-              <a:defRPr sz="1500" b="1">
-                <a:solidFill>
-                  <a:srgbClr val="1E3A8A"/>
-                </a:solidFill>
-              </a:defRPr>
             </a:pPr>
             <a:r>
-              <a:t>⚙ Asynchronous REST Backend</a:t>
-            </a:r>
-          </a:p>
-          <a:p>
-            <a:pPr>
-              <a:defRPr sz="1300">
-                <a:solidFill>
-                  <a:srgbClr val="475569"/>
-                </a:solidFill>
-              </a:defRPr>
-            </a:pPr>
-            <a:r>
-              <a:t>FastAPI / Uvicorn ASGI Server / Pydantic V2 Type Safety</a:t>
+              <a:rPr b="1">
+                <a:solidFill>
+                  <a:srgbClr val="EA580C"/>
+                </a:solidFill>
+              </a:rPr>
+              <a:t>• </a:t>
+            </a:r>
+            <a:r>
+              <a:rPr b="1" sz="1100">
+                <a:solidFill>
+                  <a:srgbClr val="1E293B"/>
+                </a:solidFill>
+              </a:rPr>
+              <a:t>Hydrocarbon Peak Identification: </a:t>
+            </a:r>
+            <a:r>
+              <a:rPr sz="1100">
+                <a:solidFill>
+                  <a:srgbClr val="64748B"/>
+                </a:solidFill>
+              </a:rPr>
+              <a:t>Prominent 15.8 Hz resonant peak distinguishing turbulent flame from stationary lighting.</a:t>
             </a:r>
           </a:p>
           <a:p>
             <a:pPr>
               <a:spcBef>
-                <a:spcPts val="800"/>
+                <a:spcPts val="600"/>
               </a:spcBef>
-              <a:defRPr sz="1500" b="1">
-                <a:solidFill>
-                  <a:srgbClr val="1E3A8A"/>
-                </a:solidFill>
-              </a:defRPr>
             </a:pPr>
             <a:r>
-              <a:t>⚙ Data Persistence &amp; Storage</a:t>
-            </a:r>
-          </a:p>
-          <a:p>
-            <a:pPr>
-              <a:defRPr sz="1300">
-                <a:solidFill>
-                  <a:srgbClr val="475569"/>
-                </a:solidFill>
-              </a:defRPr>
-            </a:pPr>
-            <a:r>
-              <a:t>SQLite / PostgreSQL with transactional integrity &amp; audit trail</a:t>
+              <a:rPr b="1">
+                <a:solidFill>
+                  <a:srgbClr val="EA580C"/>
+                </a:solidFill>
+              </a:rPr>
+              <a:t>• </a:t>
+            </a:r>
+            <a:r>
+              <a:rPr b="1" sz="1100">
+                <a:solidFill>
+                  <a:srgbClr val="1E293B"/>
+                </a:solidFill>
+              </a:rPr>
+              <a:t>False Alarm Rejection: </a:t>
+            </a:r>
+            <a:r>
+              <a:rPr sz="1100">
+                <a:solidFill>
+                  <a:srgbClr val="64748B"/>
+                </a:solidFill>
+              </a:rPr>
+              <a:t>Static lights (0 Hz) and AC fluorescent flicker (50/60 Hz) are mathematically filtered out.</a:t>
             </a:r>
           </a:p>
           <a:p>
             <a:pPr>
               <a:spcBef>
-                <a:spcPts val="800"/>
+                <a:spcPts val="600"/>
               </a:spcBef>
-              <a:defRPr sz="1500" b="1">
-                <a:solidFill>
-                  <a:srgbClr val="1E3A8A"/>
-                </a:solidFill>
-              </a:defRPr>
             </a:pPr>
             <a:r>
-              <a:t>⚙ Interactive Frontend Layer</a:t>
-            </a:r>
-          </a:p>
-          <a:p>
-            <a:pPr>
-              <a:defRPr sz="1300">
-                <a:solidFill>
-                  <a:srgbClr val="475569"/>
-                </a:solidFill>
-              </a:defRPr>
-            </a:pPr>
-            <a:r>
-              <a:t>Modern Responsive Web Portal (HTML5, Tailwind/CSS, JavaScript ES6+)</a:t>
+              <a:rPr b="1">
+                <a:solidFill>
+                  <a:srgbClr val="EA580C"/>
+                </a:solidFill>
+              </a:rPr>
+              <a:t>• </a:t>
+            </a:r>
+            <a:r>
+              <a:rPr b="1" sz="1100">
+                <a:solidFill>
+                  <a:srgbClr val="1E293B"/>
+                </a:solidFill>
+              </a:rPr>
+              <a:t>Real-Time Canvas Visualization: </a:t>
+            </a:r>
+            <a:r>
+              <a:rPr sz="1100">
+                <a:solidFill>
+                  <a:srgbClr val="64748B"/>
+                </a:solidFill>
+              </a:rPr>
+              <a:t>Live frequency histogram rendering spectral bins from 0 Hz to 24 Hz with peak marker.</a:t>
             </a:r>
           </a:p>
         </p:txBody>
@@ -4623,23 +7850,92 @@
       <p:grpSpPr/>
       <p:sp>
         <p:nvSpPr>
-          <p:cNvPr id="2" name="Rectangle 1"/>
+          <p:cNvPr id="2" name="TextBox 1"/>
+          <p:cNvSpPr txBox="1"/>
+          <p:nvPr/>
+        </p:nvSpPr>
+        <p:spPr>
+          <a:xfrm>
+            <a:off x="731520" y="365760"/>
+            <a:ext cx="10728655" cy="822960"/>
+          </a:xfrm>
+          <a:prstGeom prst="rect">
+            <a:avLst/>
+          </a:prstGeom>
+          <a:noFill/>
+        </p:spPr>
+        <p:txBody>
+          <a:bodyPr wrap="square" lIns="0" tIns="0" rIns="0" bIns="0">
+            <a:spAutoFit/>
+          </a:bodyPr>
+          <a:lstStyle/>
+          <a:p>
+            <a:r>
+              <a:rPr b="1" sz="1000">
+                <a:solidFill>
+                  <a:srgbClr val="EA580C"/>
+                </a:solidFill>
+              </a:rPr>
+              <a:t>EMERGENCY RESPONSE • PROJECT-040</a:t>
+            </a:r>
+          </a:p>
+          <a:p>
+            <a:r>
+              <a:rPr b="1" sz="2000">
+                <a:solidFill>
+                  <a:srgbClr val="0F172A"/>
+                </a:solidFill>
+              </a:rPr>
+              <a:t>Dual-Hazard Fire &amp; Toxic Smoke Incident Escalation</a:t>
+            </a:r>
+          </a:p>
+        </p:txBody>
+      </p:sp>
+      <p:pic>
+        <p:nvPicPr>
+          <p:cNvPr id="3" name="Picture 2" descr="04_dual_hazard_fire_smoke_incident.png"/>
+          <p:cNvPicPr>
+            <a:picLocks noChangeAspect="1"/>
+          </p:cNvPicPr>
+          <p:nvPr/>
+        </p:nvPicPr>
+        <p:blipFill>
+          <a:blip r:embed="rId2"/>
+          <a:stretch>
+            <a:fillRect/>
+          </a:stretch>
+        </p:blipFill>
+        <p:spPr>
+          <a:xfrm>
+            <a:off x="731520" y="1371600"/>
+            <a:ext cx="6583680" cy="4114800"/>
+          </a:xfrm>
+          <a:prstGeom prst="rect">
+            <a:avLst/>
+          </a:prstGeom>
+        </p:spPr>
+      </p:pic>
+      <p:sp>
+        <p:nvSpPr>
+          <p:cNvPr id="4" name="Rectangle 3"/>
           <p:cNvSpPr/>
           <p:nvPr/>
         </p:nvSpPr>
         <p:spPr>
           <a:xfrm>
-            <a:off x="0" y="0"/>
-            <a:ext cx="12191695" cy="1097280"/>
+            <a:off x="7589520" y="1371600"/>
+            <a:ext cx="3840480" cy="4937760"/>
           </a:xfrm>
           <a:prstGeom prst="rect">
             <a:avLst/>
           </a:prstGeom>
           <a:solidFill>
-            <a:srgbClr val="0F172A"/>
+            <a:srgbClr val="FFFFFF"/>
           </a:solidFill>
-          <a:ln>
-            <a:noFill/>
+          <a:ln w="12700">
+            <a:solidFill>
+              <a:srgbClr val="E2E8F0"/>
+            </a:solidFill>
           </a:ln>
         </p:spPr>
         <p:style>
@@ -4666,14 +7962,14 @@
       </p:sp>
       <p:sp>
         <p:nvSpPr>
-          <p:cNvPr id="3" name="TextBox 2"/>
+          <p:cNvPr id="5" name="TextBox 4"/>
           <p:cNvSpPr txBox="1"/>
           <p:nvPr/>
         </p:nvSpPr>
         <p:spPr>
           <a:xfrm>
-            <a:off x="731520" y="137160"/>
-            <a:ext cx="10698480" cy="822960"/>
+            <a:off x="7772400" y="1554480"/>
+            <a:ext cx="3474720" cy="4572000"/>
           </a:xfrm>
           <a:prstGeom prst="rect">
             <a:avLst/>
@@ -4681,46 +7977,174 @@
           <a:noFill/>
         </p:spPr>
         <p:txBody>
-          <a:bodyPr wrap="square">
+          <a:bodyPr wrap="square" lIns="0" tIns="0" rIns="0" bIns="0">
             <a:spAutoFit/>
           </a:bodyPr>
           <a:lstStyle/>
           <a:p>
+            <a:r>
+              <a:rPr b="1" sz="1400">
+                <a:solidFill>
+                  <a:srgbClr val="0F172A"/>
+                </a:solidFill>
+              </a:rPr>
+              <a:t>Tier 3 Critical Alarm Response</a:t>
+            </a:r>
+          </a:p>
+          <a:p>
             <a:pPr>
-              <a:defRPr sz="2400" b="1">
-                <a:solidFill>
-                  <a:srgbClr val="FFFFFF"/>
-                </a:solidFill>
-              </a:defRPr>
+              <a:spcBef>
+                <a:spcPts val="600"/>
+              </a:spcBef>
             </a:pPr>
             <a:r>
-              <a:t>7. Conclusion &amp; Future Roadmap</a:t>
+              <a:rPr b="1">
+                <a:solidFill>
+                  <a:srgbClr val="EA580C"/>
+                </a:solidFill>
+              </a:rPr>
+              <a:t>• </a:t>
+            </a:r>
+            <a:r>
+              <a:rPr b="1" sz="1100">
+                <a:solidFill>
+                  <a:srgbClr val="1E293B"/>
+                </a:solidFill>
+              </a:rPr>
+              <a:t>Hazard Classification: </a:t>
+            </a:r>
+            <a:r>
+              <a:rPr sz="1100">
+                <a:solidFill>
+                  <a:srgbClr val="64748B"/>
+                </a:solidFill>
+              </a:rPr>
+              <a:t>DUAL_FIRE_SMOKE_HAZARD detected with 99.4% confidence in Hazmat Chemical Depot.</a:t>
             </a:r>
           </a:p>
           <a:p>
             <a:pPr>
-              <a:defRPr sz="1100">
-                <a:solidFill>
-                  <a:srgbClr val="94A3B8"/>
-                </a:solidFill>
-              </a:defRPr>
+              <a:spcBef>
+                <a:spcPts val="600"/>
+              </a:spcBef>
             </a:pPr>
             <a:r>
-              <a:t>Academic &amp; Industrial AI Project Series  |  Project 40 of 55</a:t>
-            </a:r>
-          </a:p>
-        </p:txBody>
-      </p:sp>
-      <p:sp>
-        <p:nvSpPr>
-          <p:cNvPr id="4" name="TextBox 3"/>
+              <a:rPr b="1">
+                <a:solidFill>
+                  <a:srgbClr val="EA580C"/>
+                </a:solidFill>
+              </a:rPr>
+              <a:t>• </a:t>
+            </a:r>
+            <a:r>
+              <a:rPr b="1" sz="1100">
+                <a:solidFill>
+                  <a:srgbClr val="1E293B"/>
+                </a:solidFill>
+              </a:rPr>
+              <a:t>Severity Tier Escalation: </a:t>
+            </a:r>
+            <a:r>
+              <a:rPr sz="1100">
+                <a:solidFill>
+                  <a:srgbClr val="64748B"/>
+                </a:solidFill>
+              </a:rPr>
+              <a:t>Immediate promotion to TIER_3_CRITICAL triggering facility-wide alarm interlocks.</a:t>
+            </a:r>
+          </a:p>
+          <a:p>
+            <a:pPr>
+              <a:spcBef>
+                <a:spcPts val="600"/>
+              </a:spcBef>
+            </a:pPr>
+            <a:r>
+              <a:rPr b="1">
+                <a:solidFill>
+                  <a:srgbClr val="EA580C"/>
+                </a:solidFill>
+              </a:rPr>
+              <a:t>• </a:t>
+            </a:r>
+            <a:r>
+              <a:rPr b="1" sz="1100">
+                <a:solidFill>
+                  <a:srgbClr val="1E293B"/>
+                </a:solidFill>
+              </a:rPr>
+              <a:t>Thermal Parameter Forecast: </a:t>
+            </a:r>
+            <a:r>
+              <a:rPr sz="1100">
+                <a:solidFill>
+                  <a:srgbClr val="64748B"/>
+                </a:solidFill>
+              </a:rPr>
+              <a:t>Flame temp 745.0 C, Plume velocity 5.2 m/s, CO toxicity 580 ppm, Urgency 96.0/100.</a:t>
+            </a:r>
+          </a:p>
+          <a:p>
+            <a:pPr>
+              <a:spcBef>
+                <a:spcPts val="600"/>
+              </a:spcBef>
+            </a:pPr>
+            <a:r>
+              <a:rPr b="1">
+                <a:solidFill>
+                  <a:srgbClr val="EA580C"/>
+                </a:solidFill>
+              </a:rPr>
+              <a:t>• </a:t>
+            </a:r>
+            <a:r>
+              <a:rPr b="1" sz="1100">
+                <a:solidFill>
+                  <a:srgbClr val="1E293B"/>
+                </a:solidFill>
+              </a:rPr>
+              <a:t>Automated Deluge Command: </a:t>
+            </a:r>
+            <a:r>
+              <a:rPr sz="1100">
+                <a:solidFill>
+                  <a:srgbClr val="64748B"/>
+                </a:solidFill>
+              </a:rPr>
+              <a:t>Dispatch directive: 'AUTOMATIC SUPPRESSION DELUGE DISPATCHED: EVACUATE ZONE IMMEDIATELY'.</a:t>
+            </a:r>
+          </a:p>
+        </p:txBody>
+      </p:sp>
+    </p:spTree>
+  </p:cSld>
+  <p:clrMapOvr>
+    <a:masterClrMapping/>
+  </p:clrMapOvr>
+</p:sld>
+</file>
+
+<file path=ppt/slides/slide9.xml><?xml version="1.0" encoding="utf-8"?>
+<p:sld xmlns:a="http://schemas.openxmlformats.org/drawingml/2006/main" xmlns:p="http://schemas.openxmlformats.org/presentationml/2006/main" xmlns:r="http://schemas.openxmlformats.org/officeDocument/2006/relationships">
+  <p:cSld>
+    <p:spTree>
+      <p:nvGrpSpPr>
+        <p:cNvPr id="1" name=""/>
+        <p:cNvGrpSpPr/>
+        <p:nvPr/>
+      </p:nvGrpSpPr>
+      <p:grpSpPr/>
+      <p:sp>
+        <p:nvSpPr>
+          <p:cNvPr id="2" name="TextBox 1"/>
           <p:cNvSpPr txBox="1"/>
           <p:nvPr/>
         </p:nvSpPr>
         <p:spPr>
           <a:xfrm>
-            <a:off x="731520" y="1371600"/>
-            <a:ext cx="10698480" cy="5029200"/>
+            <a:off x="731520" y="365760"/>
+            <a:ext cx="10728655" cy="822960"/>
           </a:xfrm>
           <a:prstGeom prst="rect">
             <a:avLst/>
@@ -4728,89 +8152,254 @@
           <a:noFill/>
         </p:spPr>
         <p:txBody>
-          <a:bodyPr wrap="square">
+          <a:bodyPr wrap="square" lIns="0" tIns="0" rIns="0" bIns="0">
             <a:spAutoFit/>
           </a:bodyPr>
           <a:lstStyle/>
           <a:p>
+            <a:r>
+              <a:rPr b="1" sz="1000">
+                <a:solidFill>
+                  <a:srgbClr val="EA580C"/>
+                </a:solidFill>
+              </a:rPr>
+              <a:t>INDUSTRIAL CASE STUDY • PROJECT-040</a:t>
+            </a:r>
+          </a:p>
+          <a:p>
+            <a:r>
+              <a:rPr b="1" sz="2000">
+                <a:solidFill>
+                  <a:srgbClr val="0F172A"/>
+                </a:solidFill>
+              </a:rPr>
+              <a:t>Boiler Room Active Flame Optical Verification</a:t>
+            </a:r>
+          </a:p>
+        </p:txBody>
+      </p:sp>
+      <p:pic>
+        <p:nvPicPr>
+          <p:cNvPr id="3" name="Picture 2" descr="05_boiler_room_flame_detection.png"/>
+          <p:cNvPicPr>
+            <a:picLocks noChangeAspect="1"/>
+          </p:cNvPicPr>
+          <p:nvPr/>
+        </p:nvPicPr>
+        <p:blipFill>
+          <a:blip r:embed="rId2"/>
+          <a:stretch>
+            <a:fillRect/>
+          </a:stretch>
+        </p:blipFill>
+        <p:spPr>
+          <a:xfrm>
+            <a:off x="731520" y="1371600"/>
+            <a:ext cx="6583680" cy="4114800"/>
+          </a:xfrm>
+          <a:prstGeom prst="rect">
+            <a:avLst/>
+          </a:prstGeom>
+        </p:spPr>
+      </p:pic>
+      <p:sp>
+        <p:nvSpPr>
+          <p:cNvPr id="4" name="Rectangle 3"/>
+          <p:cNvSpPr/>
+          <p:nvPr/>
+        </p:nvSpPr>
+        <p:spPr>
+          <a:xfrm>
+            <a:off x="7589520" y="1371600"/>
+            <a:ext cx="3840480" cy="4937760"/>
+          </a:xfrm>
+          <a:prstGeom prst="rect">
+            <a:avLst/>
+          </a:prstGeom>
+          <a:solidFill>
+            <a:srgbClr val="FFFFFF"/>
+          </a:solidFill>
+          <a:ln w="12700">
+            <a:solidFill>
+              <a:srgbClr val="E2E8F0"/>
+            </a:solidFill>
+          </a:ln>
+        </p:spPr>
+        <p:style>
+          <a:lnRef idx="1">
+            <a:schemeClr val="accent1"/>
+          </a:lnRef>
+          <a:fillRef idx="3">
+            <a:schemeClr val="accent1"/>
+          </a:fillRef>
+          <a:effectRef idx="2">
+            <a:schemeClr val="accent1"/>
+          </a:effectRef>
+          <a:fontRef idx="minor">
+            <a:schemeClr val="lt1"/>
+          </a:fontRef>
+        </p:style>
+        <p:txBody>
+          <a:bodyPr rtlCol="0" anchor="ctr"/>
+          <a:lstStyle/>
+          <a:p>
+            <a:pPr algn="ctr"/>
+          </a:p>
+        </p:txBody>
+      </p:sp>
+      <p:sp>
+        <p:nvSpPr>
+          <p:cNvPr id="5" name="TextBox 4"/>
+          <p:cNvSpPr txBox="1"/>
+          <p:nvPr/>
+        </p:nvSpPr>
+        <p:spPr>
+          <a:xfrm>
+            <a:off x="7772400" y="1554480"/>
+            <a:ext cx="3474720" cy="4572000"/>
+          </a:xfrm>
+          <a:prstGeom prst="rect">
+            <a:avLst/>
+          </a:prstGeom>
+          <a:noFill/>
+        </p:spPr>
+        <p:txBody>
+          <a:bodyPr wrap="square" lIns="0" tIns="0" rIns="0" bIns="0">
+            <a:spAutoFit/>
+          </a:bodyPr>
+          <a:lstStyle/>
+          <a:p>
+            <a:r>
+              <a:rPr b="1" sz="1400">
+                <a:solidFill>
+                  <a:srgbClr val="0F172A"/>
+                </a:solidFill>
+              </a:rPr>
+              <a:t>Thermal Energy Plant Surveillance</a:t>
+            </a:r>
+          </a:p>
+          <a:p>
             <a:pPr>
               <a:spcBef>
-                <a:spcPts val="1000"/>
+                <a:spcPts val="600"/>
               </a:spcBef>
-              <a:defRPr sz="1500" b="1">
-                <a:solidFill>
-                  <a:srgbClr val="0F172A"/>
-                </a:solidFill>
-              </a:defRPr>
             </a:pPr>
             <a:r>
-              <a:t>■ Project Accomplishments</a:t>
-            </a:r>
-          </a:p>
-          <a:p>
-            <a:pPr>
-              <a:defRPr sz="1300">
-                <a:solidFill>
-                  <a:srgbClr val="475569"/>
-                </a:solidFill>
-              </a:defRPr>
-            </a:pPr>
-            <a:r>
-              <a:t>Engineered a robust, end-to-end prototype validating the initial abstract with reproducible experiments.</a:t>
+              <a:rPr b="1">
+                <a:solidFill>
+                  <a:srgbClr val="EA580C"/>
+                </a:solidFill>
+              </a:rPr>
+              <a:t>• </a:t>
+            </a:r>
+            <a:r>
+              <a:rPr b="1" sz="1100">
+                <a:solidFill>
+                  <a:srgbClr val="1E293B"/>
+                </a:solidFill>
+              </a:rPr>
+              <a:t>Zone Environment: </a:t>
+            </a:r>
+            <a:r>
+              <a:rPr sz="1100">
+                <a:solidFill>
+                  <a:srgbClr val="64748B"/>
+                </a:solidFill>
+              </a:rPr>
+              <a:t>Industrial Plant Boiler Room monitored via CCTV-BOI-01 under high baseline ambient heat.</a:t>
             </a:r>
           </a:p>
           <a:p>
             <a:pPr>
               <a:spcBef>
-                <a:spcPts val="1000"/>
+                <a:spcPts val="600"/>
               </a:spcBef>
-              <a:defRPr sz="1500" b="1">
-                <a:solidFill>
-                  <a:srgbClr val="0F172A"/>
-                </a:solidFill>
-              </a:defRPr>
             </a:pPr>
             <a:r>
-              <a:t>■ Industrial Significance</a:t>
-            </a:r>
-          </a:p>
-          <a:p>
-            <a:pPr>
-              <a:defRPr sz="1300">
-                <a:solidFill>
-                  <a:srgbClr val="475569"/>
-                </a:solidFill>
-              </a:defRPr>
-            </a:pPr>
-            <a:r>
-              <a:t>Eliminates latency and manual friction while ensuring high confidence automated decision support.</a:t>
+              <a:rPr b="1">
+                <a:solidFill>
+                  <a:srgbClr val="EA580C"/>
+                </a:solidFill>
+              </a:rPr>
+              <a:t>• </a:t>
+            </a:r>
+            <a:r>
+              <a:rPr b="1" sz="1100">
+                <a:solidFill>
+                  <a:srgbClr val="1E293B"/>
+                </a:solidFill>
+              </a:rPr>
+              <a:t>Flame Detection Confidence: </a:t>
+            </a:r>
+            <a:r>
+              <a:rPr sz="1100">
+                <a:solidFill>
+                  <a:srgbClr val="64748B"/>
+                </a:solidFill>
+              </a:rPr>
+              <a:t>98.5% confidence identifying active flame core at 12.5 Hz flicker frequency.</a:t>
             </a:r>
           </a:p>
           <a:p>
             <a:pPr>
               <a:spcBef>
-                <a:spcPts val="1000"/>
+                <a:spcPts val="600"/>
               </a:spcBef>
-              <a:defRPr sz="1500" b="1">
-                <a:solidFill>
-                  <a:srgbClr val="0F172A"/>
-                </a:solidFill>
-              </a:defRPr>
             </a:pPr>
             <a:r>
-              <a:t>■ Future Scope &amp; Extensions</a:t>
+              <a:rPr b="1">
+                <a:solidFill>
+                  <a:srgbClr val="EA580C"/>
+                </a:solidFill>
+              </a:rPr>
+              <a:t>• </a:t>
+            </a:r>
+            <a:r>
+              <a:rPr b="1" sz="1100">
+                <a:solidFill>
+                  <a:srgbClr val="1E293B"/>
+                </a:solidFill>
+              </a:rPr>
+              <a:t>Suppression Interlock: </a:t>
+            </a:r>
+            <a:r>
+              <a:rPr sz="1100">
+                <a:solidFill>
+                  <a:srgbClr val="64748B"/>
+                </a:solidFill>
+              </a:rPr>
+              <a:t>Sprinkler interlocks automatically armed with High-Pressure Water Mist / CO2 deluge system.</a:t>
             </a:r>
           </a:p>
           <a:p>
             <a:pPr>
-              <a:defRPr sz="1300">
-                <a:solidFill>
-                  <a:srgbClr val="475569"/>
-                </a:solidFill>
-              </a:defRPr>
+              <a:spcBef>
+                <a:spcPts val="600"/>
+              </a:spcBef>
             </a:pPr>
             <a:r>
-              <a:t>Integration with federated edge sensors, distributed multi-tenant cloud clustering, and automated active learning.</a:t>
+              <a:rPr b="1">
+                <a:solidFill>
+                  <a:srgbClr val="EA580C"/>
+                </a:solidFill>
+              </a:rPr>
+              <a:t>• </a:t>
+            </a:r>
+            <a:r>
+              <a:rPr b="1" sz="1100">
+                <a:solidFill>
+                  <a:srgbClr val="1E293B"/>
+                </a:solidFill>
+              </a:rPr>
+              <a:t>Operator Acknowledgment: </a:t>
+            </a:r>
+            <a:r>
+              <a:rPr sz="1100">
+                <a:solidFill>
+                  <a:srgbClr val="64748B"/>
+                </a:solidFill>
+              </a:rPr>
+              <a:t>Incident logged to relational SQLite database in WAL mode with timestamped audit block.</a:t>
             </a:r>
           </a:p>
         </p:txBody>
